--- a/etc/graphic.pptx
+++ b/etc/graphic.pptx
@@ -2,19 +2,20 @@
 <file path=ppt/presentation.xml><?xml version="1.0" encoding="utf-8"?>
 <p:presentation xmlns:a="http://schemas.openxmlformats.org/drawingml/2006/main" xmlns:r="http://schemas.openxmlformats.org/officeDocument/2006/relationships" xmlns:p="http://schemas.openxmlformats.org/presentationml/2006/main" saveSubsetFonts="1" autoCompressPictures="0">
   <p:sldMasterIdLst>
-    <p:sldMasterId id="2147483660" r:id="rId1"/>
+    <p:sldMasterId id="2147483672" r:id="rId1"/>
   </p:sldMasterIdLst>
   <p:sldIdLst>
     <p:sldId id="257" r:id="rId2"/>
-    <p:sldId id="256" r:id="rId3"/>
+    <p:sldId id="258" r:id="rId3"/>
+    <p:sldId id="256" r:id="rId4"/>
   </p:sldIdLst>
   <p:sldSz cx="12192000" cy="6858000"/>
   <p:notesSz cx="6858000" cy="9144000"/>
   <p:defaultTextStyle>
     <a:defPPr>
-      <a:defRPr lang="en-US"/>
+      <a:defRPr lang="en-TH"/>
     </a:defPPr>
-    <a:lvl1pPr marL="0" algn="l" defTabSz="457200" rtl="0" eaLnBrk="1" latinLnBrk="0" hangingPunct="1">
+    <a:lvl1pPr marL="0" algn="l" defTabSz="914400" rtl="0" eaLnBrk="1" latinLnBrk="0" hangingPunct="1">
       <a:defRPr sz="1800" kern="1200">
         <a:solidFill>
           <a:schemeClr val="tx1"/>
@@ -24,7 +25,7 @@
         <a:cs typeface="+mn-cs"/>
       </a:defRPr>
     </a:lvl1pPr>
-    <a:lvl2pPr marL="457200" algn="l" defTabSz="457200" rtl="0" eaLnBrk="1" latinLnBrk="0" hangingPunct="1">
+    <a:lvl2pPr marL="457200" algn="l" defTabSz="914400" rtl="0" eaLnBrk="1" latinLnBrk="0" hangingPunct="1">
       <a:defRPr sz="1800" kern="1200">
         <a:solidFill>
           <a:schemeClr val="tx1"/>
@@ -34,7 +35,7 @@
         <a:cs typeface="+mn-cs"/>
       </a:defRPr>
     </a:lvl2pPr>
-    <a:lvl3pPr marL="914400" algn="l" defTabSz="457200" rtl="0" eaLnBrk="1" latinLnBrk="0" hangingPunct="1">
+    <a:lvl3pPr marL="914400" algn="l" defTabSz="914400" rtl="0" eaLnBrk="1" latinLnBrk="0" hangingPunct="1">
       <a:defRPr sz="1800" kern="1200">
         <a:solidFill>
           <a:schemeClr val="tx1"/>
@@ -44,7 +45,7 @@
         <a:cs typeface="+mn-cs"/>
       </a:defRPr>
     </a:lvl3pPr>
-    <a:lvl4pPr marL="1371600" algn="l" defTabSz="457200" rtl="0" eaLnBrk="1" latinLnBrk="0" hangingPunct="1">
+    <a:lvl4pPr marL="1371600" algn="l" defTabSz="914400" rtl="0" eaLnBrk="1" latinLnBrk="0" hangingPunct="1">
       <a:defRPr sz="1800" kern="1200">
         <a:solidFill>
           <a:schemeClr val="tx1"/>
@@ -54,7 +55,7 @@
         <a:cs typeface="+mn-cs"/>
       </a:defRPr>
     </a:lvl4pPr>
-    <a:lvl5pPr marL="1828800" algn="l" defTabSz="457200" rtl="0" eaLnBrk="1" latinLnBrk="0" hangingPunct="1">
+    <a:lvl5pPr marL="1828800" algn="l" defTabSz="914400" rtl="0" eaLnBrk="1" latinLnBrk="0" hangingPunct="1">
       <a:defRPr sz="1800" kern="1200">
         <a:solidFill>
           <a:schemeClr val="tx1"/>
@@ -64,7 +65,7 @@
         <a:cs typeface="+mn-cs"/>
       </a:defRPr>
     </a:lvl5pPr>
-    <a:lvl6pPr marL="2286000" algn="l" defTabSz="457200" rtl="0" eaLnBrk="1" latinLnBrk="0" hangingPunct="1">
+    <a:lvl6pPr marL="2286000" algn="l" defTabSz="914400" rtl="0" eaLnBrk="1" latinLnBrk="0" hangingPunct="1">
       <a:defRPr sz="1800" kern="1200">
         <a:solidFill>
           <a:schemeClr val="tx1"/>
@@ -74,7 +75,7 @@
         <a:cs typeface="+mn-cs"/>
       </a:defRPr>
     </a:lvl6pPr>
-    <a:lvl7pPr marL="2743200" algn="l" defTabSz="457200" rtl="0" eaLnBrk="1" latinLnBrk="0" hangingPunct="1">
+    <a:lvl7pPr marL="2743200" algn="l" defTabSz="914400" rtl="0" eaLnBrk="1" latinLnBrk="0" hangingPunct="1">
       <a:defRPr sz="1800" kern="1200">
         <a:solidFill>
           <a:schemeClr val="tx1"/>
@@ -84,7 +85,7 @@
         <a:cs typeface="+mn-cs"/>
       </a:defRPr>
     </a:lvl7pPr>
-    <a:lvl8pPr marL="3200400" algn="l" defTabSz="457200" rtl="0" eaLnBrk="1" latinLnBrk="0" hangingPunct="1">
+    <a:lvl8pPr marL="3200400" algn="l" defTabSz="914400" rtl="0" eaLnBrk="1" latinLnBrk="0" hangingPunct="1">
       <a:defRPr sz="1800" kern="1200">
         <a:solidFill>
           <a:schemeClr val="tx1"/>
@@ -94,7 +95,7 @@
         <a:cs typeface="+mn-cs"/>
       </a:defRPr>
     </a:lvl8pPr>
-    <a:lvl9pPr marL="3657600" algn="l" defTabSz="457200" rtl="0" eaLnBrk="1" latinLnBrk="0" hangingPunct="1">
+    <a:lvl9pPr marL="3657600" algn="l" defTabSz="914400" rtl="0" eaLnBrk="1" latinLnBrk="0" hangingPunct="1">
       <a:defRPr sz="1800" kern="1200">
         <a:solidFill>
           <a:schemeClr val="tx1"/>
@@ -105,20 +106,17 @@
       </a:defRPr>
     </a:lvl9pPr>
   </p:defaultTextStyle>
+  <p:extLst>
+    <p:ext uri="{EFAFB233-063F-42B5-8137-9DF3F51BA10A}">
+      <p15:sldGuideLst xmlns:p15="http://schemas.microsoft.com/office/powerpoint/2012/main"/>
+    </p:ext>
+  </p:extLst>
 </p:presentation>
 </file>
 
 <file path=ppt/slideLayouts/slideLayout1.xml><?xml version="1.0" encoding="utf-8"?>
 <p:sldLayout xmlns:a="http://schemas.openxmlformats.org/drawingml/2006/main" xmlns:r="http://schemas.openxmlformats.org/officeDocument/2006/relationships" xmlns:p="http://schemas.openxmlformats.org/presentationml/2006/main" type="title" preserve="1">
   <p:cSld name="Title Slide">
-    <p:bg>
-      <p:bgPr>
-        <a:solidFill>
-          <a:schemeClr val="accent2"/>
-        </a:solidFill>
-        <a:effectLst/>
-      </p:bgPr>
-    </p:bg>
     <p:spTree>
       <p:nvGrpSpPr>
         <p:cNvPr id="1" name=""/>
@@ -135,7 +133,13 @@
       </p:grpSpPr>
       <p:sp>
         <p:nvSpPr>
-          <p:cNvPr id="2" name="Title 1"/>
+          <p:cNvPr id="2" name="Title 1">
+            <a:extLst>
+              <a:ext uri="{FF2B5EF4-FFF2-40B4-BE49-F238E27FC236}">
+                <a16:creationId xmlns:a16="http://schemas.microsoft.com/office/drawing/2014/main" id="{3D8D0573-86B6-BACE-FA16-F8E39420BC4C}"/>
+              </a:ext>
+            </a:extLst>
+          </p:cNvPr>
           <p:cNvSpPr>
             <a:spLocks noGrp="1"/>
           </p:cNvSpPr>
@@ -143,31 +147,17 @@
             <p:ph type="ctrTitle"/>
           </p:nvPr>
         </p:nvSpPr>
-        <p:spPr bwMode="blackWhite">
+        <p:spPr>
           <a:xfrm>
-            <a:off x="1600200" y="2386744"/>
-            <a:ext cx="8991600" cy="1645920"/>
+            <a:off x="1524000" y="1122363"/>
+            <a:ext cx="9144000" cy="2387600"/>
           </a:xfrm>
-          <a:solidFill>
-            <a:srgbClr val="FFFFFF"/>
-          </a:solidFill>
-          <a:ln w="38100">
-            <a:solidFill>
-              <a:srgbClr val="404040"/>
-            </a:solidFill>
-          </a:ln>
         </p:spPr>
         <p:txBody>
-          <a:bodyPr lIns="274320" rIns="274320" anchor="ctr" anchorCtr="1">
-            <a:normAutofit/>
-          </a:bodyPr>
+          <a:bodyPr anchor="b"/>
           <a:lstStyle>
             <a:lvl1pPr algn="ctr">
-              <a:defRPr sz="3800">
-                <a:solidFill>
-                  <a:srgbClr val="262626"/>
-                </a:solidFill>
-              </a:defRPr>
+              <a:defRPr sz="6000"/>
             </a:lvl1pPr>
           </a:lstStyle>
           <a:p>
@@ -175,13 +165,19 @@
               <a:rPr lang="en-US"/>
               <a:t>Click to edit Master title style</a:t>
             </a:r>
-            <a:endParaRPr lang="en-US" dirty="0"/>
-          </a:p>
-        </p:txBody>
-      </p:sp>
-      <p:sp>
-        <p:nvSpPr>
-          <p:cNvPr id="3" name="Subtitle 2"/>
+            <a:endParaRPr lang="en-TH"/>
+          </a:p>
+        </p:txBody>
+      </p:sp>
+      <p:sp>
+        <p:nvSpPr>
+          <p:cNvPr id="3" name="Subtitle 2">
+            <a:extLst>
+              <a:ext uri="{FF2B5EF4-FFF2-40B4-BE49-F238E27FC236}">
+                <a16:creationId xmlns:a16="http://schemas.microsoft.com/office/drawing/2014/main" id="{4A07A36E-6BBA-87A4-CFBB-3997FA10964B}"/>
+              </a:ext>
+            </a:extLst>
+          </p:cNvPr>
           <p:cNvSpPr>
             <a:spLocks noGrp="1"/>
           </p:cNvSpPr>
@@ -191,26 +187,16 @@
         </p:nvSpPr>
         <p:spPr>
           <a:xfrm>
-            <a:off x="2695194" y="4352544"/>
-            <a:ext cx="6801612" cy="1239894"/>
+            <a:off x="1524000" y="3602038"/>
+            <a:ext cx="9144000" cy="1655762"/>
           </a:xfrm>
-          <a:noFill/>
         </p:spPr>
         <p:txBody>
-          <a:bodyPr>
-            <a:normAutofit/>
-          </a:bodyPr>
+          <a:bodyPr/>
           <a:lstStyle>
             <a:lvl1pPr marL="0" indent="0" algn="ctr">
               <a:buNone/>
-              <a:defRPr sz="2000">
-                <a:solidFill>
-                  <a:schemeClr val="tx1">
-                    <a:lumMod val="75000"/>
-                    <a:lumOff val="25000"/>
-                  </a:schemeClr>
-                </a:solidFill>
-              </a:defRPr>
+              <a:defRPr sz="2400"/>
             </a:lvl1pPr>
             <a:lvl2pPr marL="457200" indent="0" algn="ctr">
               <a:buNone/>
@@ -250,13 +236,19 @@
               <a:rPr lang="en-US"/>
               <a:t>Click to edit Master subtitle style</a:t>
             </a:r>
-            <a:endParaRPr lang="en-US" dirty="0"/>
-          </a:p>
-        </p:txBody>
-      </p:sp>
-      <p:sp>
-        <p:nvSpPr>
-          <p:cNvPr id="7" name="Date Placeholder 6"/>
+            <a:endParaRPr lang="en-TH"/>
+          </a:p>
+        </p:txBody>
+      </p:sp>
+      <p:sp>
+        <p:nvSpPr>
+          <p:cNvPr id="4" name="Date Placeholder 3">
+            <a:extLst>
+              <a:ext uri="{FF2B5EF4-FFF2-40B4-BE49-F238E27FC236}">
+                <a16:creationId xmlns:a16="http://schemas.microsoft.com/office/drawing/2014/main" id="{BE670F2D-3EE7-12E0-0FE0-AF6905464A7C}"/>
+              </a:ext>
+            </a:extLst>
+          </p:cNvPr>
           <p:cNvSpPr>
             <a:spLocks noGrp="1"/>
           </p:cNvSpPr>
@@ -279,7 +271,13 @@
       </p:sp>
       <p:sp>
         <p:nvSpPr>
-          <p:cNvPr id="8" name="Footer Placeholder 7"/>
+          <p:cNvPr id="5" name="Footer Placeholder 4">
+            <a:extLst>
+              <a:ext uri="{FF2B5EF4-FFF2-40B4-BE49-F238E27FC236}">
+                <a16:creationId xmlns:a16="http://schemas.microsoft.com/office/drawing/2014/main" id="{D49ED69A-1CF5-5DE3-B36D-A662A4F31F5E}"/>
+              </a:ext>
+            </a:extLst>
+          </p:cNvPr>
           <p:cNvSpPr>
             <a:spLocks noGrp="1"/>
           </p:cNvSpPr>
@@ -298,7 +296,13 @@
       </p:sp>
       <p:sp>
         <p:nvSpPr>
-          <p:cNvPr id="9" name="Slide Number Placeholder 8"/>
+          <p:cNvPr id="6" name="Slide Number Placeholder 5">
+            <a:extLst>
+              <a:ext uri="{FF2B5EF4-FFF2-40B4-BE49-F238E27FC236}">
+                <a16:creationId xmlns:a16="http://schemas.microsoft.com/office/drawing/2014/main" id="{67652931-224F-6408-34E8-9F1BC83A1C65}"/>
+              </a:ext>
+            </a:extLst>
+          </p:cNvPr>
           <p:cNvSpPr>
             <a:spLocks noGrp="1"/>
           </p:cNvSpPr>
@@ -322,12 +326,12 @@
     </p:spTree>
     <p:extLst>
       <p:ext uri="{BB962C8B-B14F-4D97-AF65-F5344CB8AC3E}">
-        <p14:creationId xmlns:p14="http://schemas.microsoft.com/office/powerpoint/2010/main" val="294319108"/>
+        <p14:creationId xmlns:p14="http://schemas.microsoft.com/office/powerpoint/2010/main" val="2049998880"/>
       </p:ext>
     </p:extLst>
   </p:cSld>
   <p:clrMapOvr>
-    <a:overrideClrMapping bg1="dk1" tx1="lt1" bg2="dk2" tx2="lt2" accent1="accent1" accent2="accent2" accent3="accent3" accent4="accent4" accent5="accent5" accent6="accent6" hlink="hlink" folHlink="folHlink"/>
+    <a:masterClrMapping/>
   </p:clrMapOvr>
 </p:sldLayout>
 </file>
@@ -351,7 +355,13 @@
       </p:grpSpPr>
       <p:sp>
         <p:nvSpPr>
-          <p:cNvPr id="2" name="Title 1"/>
+          <p:cNvPr id="2" name="Title 1">
+            <a:extLst>
+              <a:ext uri="{FF2B5EF4-FFF2-40B4-BE49-F238E27FC236}">
+                <a16:creationId xmlns:a16="http://schemas.microsoft.com/office/drawing/2014/main" id="{27B20671-ED8A-C6F8-C6D0-0AE6B61CBA4E}"/>
+              </a:ext>
+            </a:extLst>
+          </p:cNvPr>
           <p:cNvSpPr>
             <a:spLocks noGrp="1"/>
           </p:cNvSpPr>
@@ -368,13 +378,19 @@
               <a:rPr lang="en-US"/>
               <a:t>Click to edit Master title style</a:t>
             </a:r>
-            <a:endParaRPr lang="en-US" dirty="0"/>
-          </a:p>
-        </p:txBody>
-      </p:sp>
-      <p:sp>
-        <p:nvSpPr>
-          <p:cNvPr id="3" name="Vertical Text Placeholder 2"/>
+            <a:endParaRPr lang="en-TH"/>
+          </a:p>
+        </p:txBody>
+      </p:sp>
+      <p:sp>
+        <p:nvSpPr>
+          <p:cNvPr id="3" name="Vertical Text Placeholder 2">
+            <a:extLst>
+              <a:ext uri="{FF2B5EF4-FFF2-40B4-BE49-F238E27FC236}">
+                <a16:creationId xmlns:a16="http://schemas.microsoft.com/office/drawing/2014/main" id="{D7055BA0-AAC2-52C3-9F85-75972F472CE3}"/>
+              </a:ext>
+            </a:extLst>
+          </p:cNvPr>
           <p:cNvSpPr>
             <a:spLocks noGrp="1"/>
           </p:cNvSpPr>
@@ -420,13 +436,19 @@
               <a:rPr lang="en-US"/>
               <a:t>Fifth level</a:t>
             </a:r>
-            <a:endParaRPr lang="en-US" dirty="0"/>
-          </a:p>
-        </p:txBody>
-      </p:sp>
-      <p:sp>
-        <p:nvSpPr>
-          <p:cNvPr id="4" name="Date Placeholder 3"/>
+            <a:endParaRPr lang="en-TH"/>
+          </a:p>
+        </p:txBody>
+      </p:sp>
+      <p:sp>
+        <p:nvSpPr>
+          <p:cNvPr id="4" name="Date Placeholder 3">
+            <a:extLst>
+              <a:ext uri="{FF2B5EF4-FFF2-40B4-BE49-F238E27FC236}">
+                <a16:creationId xmlns:a16="http://schemas.microsoft.com/office/drawing/2014/main" id="{B7524894-7B7A-C6D5-814A-C786E971AE65}"/>
+              </a:ext>
+            </a:extLst>
+          </p:cNvPr>
           <p:cNvSpPr>
             <a:spLocks noGrp="1"/>
           </p:cNvSpPr>
@@ -449,7 +471,13 @@
       </p:sp>
       <p:sp>
         <p:nvSpPr>
-          <p:cNvPr id="5" name="Footer Placeholder 4"/>
+          <p:cNvPr id="5" name="Footer Placeholder 4">
+            <a:extLst>
+              <a:ext uri="{FF2B5EF4-FFF2-40B4-BE49-F238E27FC236}">
+                <a16:creationId xmlns:a16="http://schemas.microsoft.com/office/drawing/2014/main" id="{8AE8F118-5BEE-1D3A-F3CA-A7AFFAE582FF}"/>
+              </a:ext>
+            </a:extLst>
+          </p:cNvPr>
           <p:cNvSpPr>
             <a:spLocks noGrp="1"/>
           </p:cNvSpPr>
@@ -468,7 +496,13 @@
       </p:sp>
       <p:sp>
         <p:nvSpPr>
-          <p:cNvPr id="6" name="Slide Number Placeholder 5"/>
+          <p:cNvPr id="6" name="Slide Number Placeholder 5">
+            <a:extLst>
+              <a:ext uri="{FF2B5EF4-FFF2-40B4-BE49-F238E27FC236}">
+                <a16:creationId xmlns:a16="http://schemas.microsoft.com/office/drawing/2014/main" id="{83B08C14-A717-A51C-2084-452E75F73F78}"/>
+              </a:ext>
+            </a:extLst>
+          </p:cNvPr>
           <p:cNvSpPr>
             <a:spLocks noGrp="1"/>
           </p:cNvSpPr>
@@ -492,7 +526,7 @@
     </p:spTree>
     <p:extLst>
       <p:ext uri="{BB962C8B-B14F-4D97-AF65-F5344CB8AC3E}">
-        <p14:creationId xmlns:p14="http://schemas.microsoft.com/office/powerpoint/2010/main" val="3771045091"/>
+        <p14:creationId xmlns:p14="http://schemas.microsoft.com/office/powerpoint/2010/main" val="3192520150"/>
       </p:ext>
     </p:extLst>
   </p:cSld>
@@ -521,7 +555,13 @@
       </p:grpSpPr>
       <p:sp>
         <p:nvSpPr>
-          <p:cNvPr id="2" name="Vertical Title 1"/>
+          <p:cNvPr id="2" name="Vertical Title 1">
+            <a:extLst>
+              <a:ext uri="{FF2B5EF4-FFF2-40B4-BE49-F238E27FC236}">
+                <a16:creationId xmlns:a16="http://schemas.microsoft.com/office/drawing/2014/main" id="{76823109-2E0B-5CDD-3125-E143FD7A0BC6}"/>
+              </a:ext>
+            </a:extLst>
+          </p:cNvPr>
           <p:cNvSpPr>
             <a:spLocks noGrp="1"/>
           </p:cNvSpPr>
@@ -531,8 +571,8 @@
         </p:nvSpPr>
         <p:spPr>
           <a:xfrm>
-            <a:off x="8653112" y="937260"/>
-            <a:ext cx="1298608" cy="4983480"/>
+            <a:off x="8724900" y="365125"/>
+            <a:ext cx="2628900" cy="5811838"/>
           </a:xfrm>
         </p:spPr>
         <p:txBody>
@@ -543,13 +583,19 @@
               <a:rPr lang="en-US"/>
               <a:t>Click to edit Master title style</a:t>
             </a:r>
-            <a:endParaRPr lang="en-US" dirty="0"/>
-          </a:p>
-        </p:txBody>
-      </p:sp>
-      <p:sp>
-        <p:nvSpPr>
-          <p:cNvPr id="3" name="Vertical Text Placeholder 2"/>
+            <a:endParaRPr lang="en-TH"/>
+          </a:p>
+        </p:txBody>
+      </p:sp>
+      <p:sp>
+        <p:nvSpPr>
+          <p:cNvPr id="3" name="Vertical Text Placeholder 2">
+            <a:extLst>
+              <a:ext uri="{FF2B5EF4-FFF2-40B4-BE49-F238E27FC236}">
+                <a16:creationId xmlns:a16="http://schemas.microsoft.com/office/drawing/2014/main" id="{44185D3D-658B-CE62-78AC-4A433440BF19}"/>
+              </a:ext>
+            </a:extLst>
+          </p:cNvPr>
           <p:cNvSpPr>
             <a:spLocks noGrp="1"/>
           </p:cNvSpPr>
@@ -559,8 +605,8 @@
         </p:nvSpPr>
         <p:spPr>
           <a:xfrm>
-            <a:off x="2231136" y="937260"/>
-            <a:ext cx="6198489" cy="4983480"/>
+            <a:off x="838200" y="365125"/>
+            <a:ext cx="7734300" cy="5811838"/>
           </a:xfrm>
         </p:spPr>
         <p:txBody>
@@ -600,13 +646,19 @@
               <a:rPr lang="en-US"/>
               <a:t>Fifth level</a:t>
             </a:r>
-            <a:endParaRPr lang="en-US" dirty="0"/>
-          </a:p>
-        </p:txBody>
-      </p:sp>
-      <p:sp>
-        <p:nvSpPr>
-          <p:cNvPr id="4" name="Date Placeholder 3"/>
+            <a:endParaRPr lang="en-TH"/>
+          </a:p>
+        </p:txBody>
+      </p:sp>
+      <p:sp>
+        <p:nvSpPr>
+          <p:cNvPr id="4" name="Date Placeholder 3">
+            <a:extLst>
+              <a:ext uri="{FF2B5EF4-FFF2-40B4-BE49-F238E27FC236}">
+                <a16:creationId xmlns:a16="http://schemas.microsoft.com/office/drawing/2014/main" id="{3C24F4B8-C884-2A9B-83BE-2DF88DA944C1}"/>
+              </a:ext>
+            </a:extLst>
+          </p:cNvPr>
           <p:cNvSpPr>
             <a:spLocks noGrp="1"/>
           </p:cNvSpPr>
@@ -629,7 +681,13 @@
       </p:sp>
       <p:sp>
         <p:nvSpPr>
-          <p:cNvPr id="5" name="Footer Placeholder 4"/>
+          <p:cNvPr id="5" name="Footer Placeholder 4">
+            <a:extLst>
+              <a:ext uri="{FF2B5EF4-FFF2-40B4-BE49-F238E27FC236}">
+                <a16:creationId xmlns:a16="http://schemas.microsoft.com/office/drawing/2014/main" id="{DFFE30A4-7F55-ABEE-9DB5-91CA46F9FAA9}"/>
+              </a:ext>
+            </a:extLst>
+          </p:cNvPr>
           <p:cNvSpPr>
             <a:spLocks noGrp="1"/>
           </p:cNvSpPr>
@@ -648,7 +706,13 @@
       </p:sp>
       <p:sp>
         <p:nvSpPr>
-          <p:cNvPr id="6" name="Slide Number Placeholder 5"/>
+          <p:cNvPr id="6" name="Slide Number Placeholder 5">
+            <a:extLst>
+              <a:ext uri="{FF2B5EF4-FFF2-40B4-BE49-F238E27FC236}">
+                <a16:creationId xmlns:a16="http://schemas.microsoft.com/office/drawing/2014/main" id="{EF0EEEDC-02B1-39C8-9EEF-8AAD3194230A}"/>
+              </a:ext>
+            </a:extLst>
+          </p:cNvPr>
           <p:cNvSpPr>
             <a:spLocks noGrp="1"/>
           </p:cNvSpPr>
@@ -672,7 +736,7 @@
     </p:spTree>
     <p:extLst>
       <p:ext uri="{BB962C8B-B14F-4D97-AF65-F5344CB8AC3E}">
-        <p14:creationId xmlns:p14="http://schemas.microsoft.com/office/powerpoint/2010/main" val="1340405941"/>
+        <p14:creationId xmlns:p14="http://schemas.microsoft.com/office/powerpoint/2010/main" val="713841066"/>
       </p:ext>
     </p:extLst>
   </p:cSld>
@@ -701,7 +765,13 @@
       </p:grpSpPr>
       <p:sp>
         <p:nvSpPr>
-          <p:cNvPr id="2" name="Title 1"/>
+          <p:cNvPr id="2" name="Title 1">
+            <a:extLst>
+              <a:ext uri="{FF2B5EF4-FFF2-40B4-BE49-F238E27FC236}">
+                <a16:creationId xmlns:a16="http://schemas.microsoft.com/office/drawing/2014/main" id="{46D07733-CBE3-15CE-4A76-8738C48CF655}"/>
+              </a:ext>
+            </a:extLst>
+          </p:cNvPr>
           <p:cNvSpPr>
             <a:spLocks noGrp="1"/>
           </p:cNvSpPr>
@@ -718,13 +788,19 @@
               <a:rPr lang="en-US"/>
               <a:t>Click to edit Master title style</a:t>
             </a:r>
-            <a:endParaRPr lang="en-US" dirty="0"/>
-          </a:p>
-        </p:txBody>
-      </p:sp>
-      <p:sp>
-        <p:nvSpPr>
-          <p:cNvPr id="3" name="Content Placeholder 2"/>
+            <a:endParaRPr lang="en-TH"/>
+          </a:p>
+        </p:txBody>
+      </p:sp>
+      <p:sp>
+        <p:nvSpPr>
+          <p:cNvPr id="3" name="Content Placeholder 2">
+            <a:extLst>
+              <a:ext uri="{FF2B5EF4-FFF2-40B4-BE49-F238E27FC236}">
+                <a16:creationId xmlns:a16="http://schemas.microsoft.com/office/drawing/2014/main" id="{2F64CDCD-D02C-4F4B-E323-4CA567D1E4F3}"/>
+              </a:ext>
+            </a:extLst>
+          </p:cNvPr>
           <p:cNvSpPr>
             <a:spLocks noGrp="1"/>
           </p:cNvSpPr>
@@ -770,13 +846,19 @@
               <a:rPr lang="en-US"/>
               <a:t>Fifth level</a:t>
             </a:r>
-            <a:endParaRPr lang="en-US" dirty="0"/>
-          </a:p>
-        </p:txBody>
-      </p:sp>
-      <p:sp>
-        <p:nvSpPr>
-          <p:cNvPr id="7" name="Date Placeholder 6"/>
+            <a:endParaRPr lang="en-TH"/>
+          </a:p>
+        </p:txBody>
+      </p:sp>
+      <p:sp>
+        <p:nvSpPr>
+          <p:cNvPr id="4" name="Date Placeholder 3">
+            <a:extLst>
+              <a:ext uri="{FF2B5EF4-FFF2-40B4-BE49-F238E27FC236}">
+                <a16:creationId xmlns:a16="http://schemas.microsoft.com/office/drawing/2014/main" id="{5BF89660-F678-2AE5-842B-D59255894322}"/>
+              </a:ext>
+            </a:extLst>
+          </p:cNvPr>
           <p:cNvSpPr>
             <a:spLocks noGrp="1"/>
           </p:cNvSpPr>
@@ -799,7 +881,13 @@
       </p:sp>
       <p:sp>
         <p:nvSpPr>
-          <p:cNvPr id="8" name="Footer Placeholder 7"/>
+          <p:cNvPr id="5" name="Footer Placeholder 4">
+            <a:extLst>
+              <a:ext uri="{FF2B5EF4-FFF2-40B4-BE49-F238E27FC236}">
+                <a16:creationId xmlns:a16="http://schemas.microsoft.com/office/drawing/2014/main" id="{1DC2B253-C153-0E81-0310-0EB3A7683C2D}"/>
+              </a:ext>
+            </a:extLst>
+          </p:cNvPr>
           <p:cNvSpPr>
             <a:spLocks noGrp="1"/>
           </p:cNvSpPr>
@@ -818,7 +906,13 @@
       </p:sp>
       <p:sp>
         <p:nvSpPr>
-          <p:cNvPr id="9" name="Slide Number Placeholder 8"/>
+          <p:cNvPr id="6" name="Slide Number Placeholder 5">
+            <a:extLst>
+              <a:ext uri="{FF2B5EF4-FFF2-40B4-BE49-F238E27FC236}">
+                <a16:creationId xmlns:a16="http://schemas.microsoft.com/office/drawing/2014/main" id="{C8889520-2273-B61B-7188-8CBE5A6659CF}"/>
+              </a:ext>
+            </a:extLst>
+          </p:cNvPr>
           <p:cNvSpPr>
             <a:spLocks noGrp="1"/>
           </p:cNvSpPr>
@@ -842,7 +936,7 @@
     </p:spTree>
     <p:extLst>
       <p:ext uri="{BB962C8B-B14F-4D97-AF65-F5344CB8AC3E}">
-        <p14:creationId xmlns:p14="http://schemas.microsoft.com/office/powerpoint/2010/main" val="1921656627"/>
+        <p14:creationId xmlns:p14="http://schemas.microsoft.com/office/powerpoint/2010/main" val="1661920248"/>
       </p:ext>
     </p:extLst>
   </p:cSld>
@@ -855,14 +949,6 @@
 <file path=ppt/slideLayouts/slideLayout3.xml><?xml version="1.0" encoding="utf-8"?>
 <p:sldLayout xmlns:a="http://schemas.openxmlformats.org/drawingml/2006/main" xmlns:r="http://schemas.openxmlformats.org/officeDocument/2006/relationships" xmlns:p="http://schemas.openxmlformats.org/presentationml/2006/main" type="secHead" preserve="1">
   <p:cSld name="Section Header">
-    <p:bg>
-      <p:bgPr>
-        <a:solidFill>
-          <a:schemeClr val="accent1"/>
-        </a:solidFill>
-        <a:effectLst/>
-      </p:bgPr>
-    </p:bg>
     <p:spTree>
       <p:nvGrpSpPr>
         <p:cNvPr id="1" name=""/>
@@ -879,7 +965,13 @@
       </p:grpSpPr>
       <p:sp>
         <p:nvSpPr>
-          <p:cNvPr id="2" name="Title 1"/>
+          <p:cNvPr id="2" name="Title 1">
+            <a:extLst>
+              <a:ext uri="{FF2B5EF4-FFF2-40B4-BE49-F238E27FC236}">
+                <a16:creationId xmlns:a16="http://schemas.microsoft.com/office/drawing/2014/main" id="{FE853CD1-D426-8486-574E-1426CC07F7A6}"/>
+              </a:ext>
+            </a:extLst>
+          </p:cNvPr>
           <p:cNvSpPr>
             <a:spLocks noGrp="1"/>
           </p:cNvSpPr>
@@ -887,31 +979,17 @@
             <p:ph type="title"/>
           </p:nvPr>
         </p:nvSpPr>
-        <p:spPr bwMode="blackWhite">
+        <p:spPr>
           <a:xfrm>
-            <a:off x="1600200" y="2386744"/>
-            <a:ext cx="8991600" cy="1645920"/>
+            <a:off x="831850" y="1709738"/>
+            <a:ext cx="10515600" cy="2852737"/>
           </a:xfrm>
-          <a:solidFill>
-            <a:srgbClr val="FFFFFF"/>
-          </a:solidFill>
-          <a:ln w="38100">
-            <a:solidFill>
-              <a:srgbClr val="404040"/>
-            </a:solidFill>
-          </a:ln>
         </p:spPr>
         <p:txBody>
-          <a:bodyPr lIns="274320" rIns="274320" anchor="ctr" anchorCtr="1">
-            <a:normAutofit/>
-          </a:bodyPr>
+          <a:bodyPr anchor="b"/>
           <a:lstStyle>
             <a:lvl1pPr>
-              <a:defRPr sz="3800">
-                <a:solidFill>
-                  <a:srgbClr val="262626"/>
-                </a:solidFill>
-              </a:defRPr>
+              <a:defRPr sz="6000"/>
             </a:lvl1pPr>
           </a:lstStyle>
           <a:p>
@@ -919,13 +997,19 @@
               <a:rPr lang="en-US"/>
               <a:t>Click to edit Master title style</a:t>
             </a:r>
-            <a:endParaRPr lang="en-US" dirty="0"/>
-          </a:p>
-        </p:txBody>
-      </p:sp>
-      <p:sp>
-        <p:nvSpPr>
-          <p:cNvPr id="3" name="Text Placeholder 2"/>
+            <a:endParaRPr lang="en-TH"/>
+          </a:p>
+        </p:txBody>
+      </p:sp>
+      <p:sp>
+        <p:nvSpPr>
+          <p:cNvPr id="3" name="Text Placeholder 2">
+            <a:extLst>
+              <a:ext uri="{FF2B5EF4-FFF2-40B4-BE49-F238E27FC236}">
+                <a16:creationId xmlns:a16="http://schemas.microsoft.com/office/drawing/2014/main" id="{36A642B5-E611-0FB3-2C06-D154BC6B604B}"/>
+              </a:ext>
+            </a:extLst>
+          </p:cNvPr>
           <p:cNvSpPr>
             <a:spLocks noGrp="1"/>
           </p:cNvSpPr>
@@ -935,20 +1019,20 @@
         </p:nvSpPr>
         <p:spPr>
           <a:xfrm>
-            <a:off x="2695194" y="4352465"/>
-            <a:ext cx="6801612" cy="1265082"/>
+            <a:off x="831850" y="4589463"/>
+            <a:ext cx="10515600" cy="1500187"/>
           </a:xfrm>
         </p:spPr>
         <p:txBody>
-          <a:bodyPr anchor="t" anchorCtr="1">
-            <a:normAutofit/>
-          </a:bodyPr>
+          <a:bodyPr/>
           <a:lstStyle>
             <a:lvl1pPr marL="0" indent="0">
               <a:buNone/>
-              <a:defRPr sz="2000">
+              <a:defRPr sz="2400">
                 <a:solidFill>
-                  <a:schemeClr val="tx1"/>
+                  <a:schemeClr val="tx1">
+                    <a:tint val="82000"/>
+                  </a:schemeClr>
                 </a:solidFill>
               </a:defRPr>
             </a:lvl1pPr>
@@ -957,7 +1041,7 @@
               <a:defRPr sz="2000">
                 <a:solidFill>
                   <a:schemeClr val="tx1">
-                    <a:tint val="75000"/>
+                    <a:tint val="82000"/>
                   </a:schemeClr>
                 </a:solidFill>
               </a:defRPr>
@@ -967,7 +1051,7 @@
               <a:defRPr sz="1800">
                 <a:solidFill>
                   <a:schemeClr val="tx1">
-                    <a:tint val="75000"/>
+                    <a:tint val="82000"/>
                   </a:schemeClr>
                 </a:solidFill>
               </a:defRPr>
@@ -977,7 +1061,7 @@
               <a:defRPr sz="1600">
                 <a:solidFill>
                   <a:schemeClr val="tx1">
-                    <a:tint val="75000"/>
+                    <a:tint val="82000"/>
                   </a:schemeClr>
                 </a:solidFill>
               </a:defRPr>
@@ -987,7 +1071,7 @@
               <a:defRPr sz="1600">
                 <a:solidFill>
                   <a:schemeClr val="tx1">
-                    <a:tint val="75000"/>
+                    <a:tint val="82000"/>
                   </a:schemeClr>
                 </a:solidFill>
               </a:defRPr>
@@ -997,7 +1081,7 @@
               <a:defRPr sz="1600">
                 <a:solidFill>
                   <a:schemeClr val="tx1">
-                    <a:tint val="75000"/>
+                    <a:tint val="82000"/>
                   </a:schemeClr>
                 </a:solidFill>
               </a:defRPr>
@@ -1007,7 +1091,7 @@
               <a:defRPr sz="1600">
                 <a:solidFill>
                   <a:schemeClr val="tx1">
-                    <a:tint val="75000"/>
+                    <a:tint val="82000"/>
                   </a:schemeClr>
                 </a:solidFill>
               </a:defRPr>
@@ -1017,7 +1101,7 @@
               <a:defRPr sz="1600">
                 <a:solidFill>
                   <a:schemeClr val="tx1">
-                    <a:tint val="75000"/>
+                    <a:tint val="82000"/>
                   </a:schemeClr>
                 </a:solidFill>
               </a:defRPr>
@@ -1027,7 +1111,7 @@
               <a:defRPr sz="1600">
                 <a:solidFill>
                   <a:schemeClr val="tx1">
-                    <a:tint val="75000"/>
+                    <a:tint val="82000"/>
                   </a:schemeClr>
                 </a:solidFill>
               </a:defRPr>
@@ -1044,7 +1128,13 @@
       </p:sp>
       <p:sp>
         <p:nvSpPr>
-          <p:cNvPr id="7" name="Date Placeholder 6"/>
+          <p:cNvPr id="4" name="Date Placeholder 3">
+            <a:extLst>
+              <a:ext uri="{FF2B5EF4-FFF2-40B4-BE49-F238E27FC236}">
+                <a16:creationId xmlns:a16="http://schemas.microsoft.com/office/drawing/2014/main" id="{8907EF2E-EFD2-BCD5-1A7A-B0A98BF11A51}"/>
+              </a:ext>
+            </a:extLst>
+          </p:cNvPr>
           <p:cNvSpPr>
             <a:spLocks noGrp="1"/>
           </p:cNvSpPr>
@@ -1067,7 +1157,13 @@
       </p:sp>
       <p:sp>
         <p:nvSpPr>
-          <p:cNvPr id="8" name="Footer Placeholder 7"/>
+          <p:cNvPr id="5" name="Footer Placeholder 4">
+            <a:extLst>
+              <a:ext uri="{FF2B5EF4-FFF2-40B4-BE49-F238E27FC236}">
+                <a16:creationId xmlns:a16="http://schemas.microsoft.com/office/drawing/2014/main" id="{D2CBD10E-6C38-E7E7-E962-C458304455DE}"/>
+              </a:ext>
+            </a:extLst>
+          </p:cNvPr>
           <p:cNvSpPr>
             <a:spLocks noGrp="1"/>
           </p:cNvSpPr>
@@ -1086,7 +1182,13 @@
       </p:sp>
       <p:sp>
         <p:nvSpPr>
-          <p:cNvPr id="9" name="Slide Number Placeholder 8"/>
+          <p:cNvPr id="6" name="Slide Number Placeholder 5">
+            <a:extLst>
+              <a:ext uri="{FF2B5EF4-FFF2-40B4-BE49-F238E27FC236}">
+                <a16:creationId xmlns:a16="http://schemas.microsoft.com/office/drawing/2014/main" id="{2782D214-376D-57FD-D0E7-0A2A493D82B4}"/>
+              </a:ext>
+            </a:extLst>
+          </p:cNvPr>
           <p:cNvSpPr>
             <a:spLocks noGrp="1"/>
           </p:cNvSpPr>
@@ -1110,12 +1212,12 @@
     </p:spTree>
     <p:extLst>
       <p:ext uri="{BB962C8B-B14F-4D97-AF65-F5344CB8AC3E}">
-        <p14:creationId xmlns:p14="http://schemas.microsoft.com/office/powerpoint/2010/main" val="828951817"/>
+        <p14:creationId xmlns:p14="http://schemas.microsoft.com/office/powerpoint/2010/main" val="2148053089"/>
       </p:ext>
     </p:extLst>
   </p:cSld>
   <p:clrMapOvr>
-    <a:overrideClrMapping bg1="dk1" tx1="lt1" bg2="dk2" tx2="lt2" accent1="accent1" accent2="accent2" accent3="accent3" accent4="accent4" accent5="accent5" accent6="accent6" hlink="hlink" folHlink="folHlink"/>
+    <a:masterClrMapping/>
   </p:clrMapOvr>
 </p:sldLayout>
 </file>
@@ -1139,7 +1241,13 @@
       </p:grpSpPr>
       <p:sp>
         <p:nvSpPr>
-          <p:cNvPr id="2" name="Title 1"/>
+          <p:cNvPr id="2" name="Title 1">
+            <a:extLst>
+              <a:ext uri="{FF2B5EF4-FFF2-40B4-BE49-F238E27FC236}">
+                <a16:creationId xmlns:a16="http://schemas.microsoft.com/office/drawing/2014/main" id="{C4BDD7B0-0D83-CD97-F24F-88457BCD996A}"/>
+              </a:ext>
+            </a:extLst>
+          </p:cNvPr>
           <p:cNvSpPr>
             <a:spLocks noGrp="1"/>
           </p:cNvSpPr>
@@ -1156,13 +1264,19 @@
               <a:rPr lang="en-US"/>
               <a:t>Click to edit Master title style</a:t>
             </a:r>
-            <a:endParaRPr lang="en-US" dirty="0"/>
-          </a:p>
-        </p:txBody>
-      </p:sp>
-      <p:sp>
-        <p:nvSpPr>
-          <p:cNvPr id="3" name="Content Placeholder 2"/>
+            <a:endParaRPr lang="en-TH"/>
+          </a:p>
+        </p:txBody>
+      </p:sp>
+      <p:sp>
+        <p:nvSpPr>
+          <p:cNvPr id="3" name="Content Placeholder 2">
+            <a:extLst>
+              <a:ext uri="{FF2B5EF4-FFF2-40B4-BE49-F238E27FC236}">
+                <a16:creationId xmlns:a16="http://schemas.microsoft.com/office/drawing/2014/main" id="{F685404F-E67A-2942-16DA-3156DA6C7581}"/>
+              </a:ext>
+            </a:extLst>
+          </p:cNvPr>
           <p:cNvSpPr>
             <a:spLocks noGrp="1"/>
           </p:cNvSpPr>
@@ -1172,8 +1286,8 @@
         </p:nvSpPr>
         <p:spPr>
           <a:xfrm>
-            <a:off x="1581912" y="2638044"/>
-            <a:ext cx="4271771" cy="3101982"/>
+            <a:off x="838200" y="1825625"/>
+            <a:ext cx="5181600" cy="4351338"/>
           </a:xfrm>
         </p:spPr>
         <p:txBody>
@@ -1213,13 +1327,19 @@
               <a:rPr lang="en-US"/>
               <a:t>Fifth level</a:t>
             </a:r>
-            <a:endParaRPr lang="en-US" dirty="0"/>
-          </a:p>
-        </p:txBody>
-      </p:sp>
-      <p:sp>
-        <p:nvSpPr>
-          <p:cNvPr id="4" name="Content Placeholder 3"/>
+            <a:endParaRPr lang="en-TH"/>
+          </a:p>
+        </p:txBody>
+      </p:sp>
+      <p:sp>
+        <p:nvSpPr>
+          <p:cNvPr id="4" name="Content Placeholder 3">
+            <a:extLst>
+              <a:ext uri="{FF2B5EF4-FFF2-40B4-BE49-F238E27FC236}">
+                <a16:creationId xmlns:a16="http://schemas.microsoft.com/office/drawing/2014/main" id="{E48C3F5F-0011-791B-FBBE-822CD33D4953}"/>
+              </a:ext>
+            </a:extLst>
+          </p:cNvPr>
           <p:cNvSpPr>
             <a:spLocks noGrp="1"/>
           </p:cNvSpPr>
@@ -1229,8 +1349,8 @@
         </p:nvSpPr>
         <p:spPr>
           <a:xfrm>
-            <a:off x="6338315" y="2638044"/>
-            <a:ext cx="4270247" cy="3101982"/>
+            <a:off x="6172200" y="1825625"/>
+            <a:ext cx="5181600" cy="4351338"/>
           </a:xfrm>
         </p:spPr>
         <p:txBody>
@@ -1270,13 +1390,19 @@
               <a:rPr lang="en-US"/>
               <a:t>Fifth level</a:t>
             </a:r>
-            <a:endParaRPr lang="en-US" dirty="0"/>
-          </a:p>
-        </p:txBody>
-      </p:sp>
-      <p:sp>
-        <p:nvSpPr>
-          <p:cNvPr id="8" name="Date Placeholder 7"/>
+            <a:endParaRPr lang="en-TH"/>
+          </a:p>
+        </p:txBody>
+      </p:sp>
+      <p:sp>
+        <p:nvSpPr>
+          <p:cNvPr id="5" name="Date Placeholder 4">
+            <a:extLst>
+              <a:ext uri="{FF2B5EF4-FFF2-40B4-BE49-F238E27FC236}">
+                <a16:creationId xmlns:a16="http://schemas.microsoft.com/office/drawing/2014/main" id="{669FEF5F-79E8-E941-BDD1-F91FED889900}"/>
+              </a:ext>
+            </a:extLst>
+          </p:cNvPr>
           <p:cNvSpPr>
             <a:spLocks noGrp="1"/>
           </p:cNvSpPr>
@@ -1299,7 +1425,13 @@
       </p:sp>
       <p:sp>
         <p:nvSpPr>
-          <p:cNvPr id="9" name="Footer Placeholder 8"/>
+          <p:cNvPr id="6" name="Footer Placeholder 5">
+            <a:extLst>
+              <a:ext uri="{FF2B5EF4-FFF2-40B4-BE49-F238E27FC236}">
+                <a16:creationId xmlns:a16="http://schemas.microsoft.com/office/drawing/2014/main" id="{95EA7B5E-CBB3-6DE4-4C08-0E099ECFB103}"/>
+              </a:ext>
+            </a:extLst>
+          </p:cNvPr>
           <p:cNvSpPr>
             <a:spLocks noGrp="1"/>
           </p:cNvSpPr>
@@ -1318,7 +1450,13 @@
       </p:sp>
       <p:sp>
         <p:nvSpPr>
-          <p:cNvPr id="10" name="Slide Number Placeholder 9"/>
+          <p:cNvPr id="7" name="Slide Number Placeholder 6">
+            <a:extLst>
+              <a:ext uri="{FF2B5EF4-FFF2-40B4-BE49-F238E27FC236}">
+                <a16:creationId xmlns:a16="http://schemas.microsoft.com/office/drawing/2014/main" id="{7FDD0308-63B0-5243-7B89-C2F4A5A5DA01}"/>
+              </a:ext>
+            </a:extLst>
+          </p:cNvPr>
           <p:cNvSpPr>
             <a:spLocks noGrp="1"/>
           </p:cNvSpPr>
@@ -1342,7 +1480,7 @@
     </p:spTree>
     <p:extLst>
       <p:ext uri="{BB962C8B-B14F-4D97-AF65-F5344CB8AC3E}">
-        <p14:creationId xmlns:p14="http://schemas.microsoft.com/office/powerpoint/2010/main" val="489594996"/>
+        <p14:creationId xmlns:p14="http://schemas.microsoft.com/office/powerpoint/2010/main" val="3040845022"/>
       </p:ext>
     </p:extLst>
   </p:cSld>
@@ -1371,38 +1509,70 @@
       </p:grpSpPr>
       <p:sp>
         <p:nvSpPr>
-          <p:cNvPr id="3" name="Text Placeholder 2"/>
-          <p:cNvSpPr>
-            <a:spLocks noGrp="1"/>
-          </p:cNvSpPr>
-          <p:nvPr>
-            <p:ph type="body" idx="1"/>
+          <p:cNvPr id="2" name="Title 1">
+            <a:extLst>
+              <a:ext uri="{FF2B5EF4-FFF2-40B4-BE49-F238E27FC236}">
+                <a16:creationId xmlns:a16="http://schemas.microsoft.com/office/drawing/2014/main" id="{57D8A3AF-DF60-552F-A119-A8A80830A31A}"/>
+              </a:ext>
+            </a:extLst>
+          </p:cNvPr>
+          <p:cNvSpPr>
+            <a:spLocks noGrp="1"/>
+          </p:cNvSpPr>
+          <p:nvPr>
+            <p:ph type="title"/>
           </p:nvPr>
         </p:nvSpPr>
         <p:spPr>
           <a:xfrm>
-            <a:off x="1583436" y="2313433"/>
-            <a:ext cx="4270248" cy="704087"/>
+            <a:off x="839788" y="365125"/>
+            <a:ext cx="10515600" cy="1325563"/>
           </a:xfrm>
         </p:spPr>
         <p:txBody>
-          <a:bodyPr anchor="b" anchorCtr="1">
-            <a:normAutofit/>
-          </a:bodyPr>
+          <a:bodyPr/>
+          <a:lstStyle/>
+          <a:p>
+            <a:r>
+              <a:rPr lang="en-US"/>
+              <a:t>Click to edit Master title style</a:t>
+            </a:r>
+            <a:endParaRPr lang="en-TH"/>
+          </a:p>
+        </p:txBody>
+      </p:sp>
+      <p:sp>
+        <p:nvSpPr>
+          <p:cNvPr id="3" name="Text Placeholder 2">
+            <a:extLst>
+              <a:ext uri="{FF2B5EF4-FFF2-40B4-BE49-F238E27FC236}">
+                <a16:creationId xmlns:a16="http://schemas.microsoft.com/office/drawing/2014/main" id="{F42E65DA-98FF-9AB6-0738-B867AEF1232A}"/>
+              </a:ext>
+            </a:extLst>
+          </p:cNvPr>
+          <p:cNvSpPr>
+            <a:spLocks noGrp="1"/>
+          </p:cNvSpPr>
+          <p:nvPr>
+            <p:ph type="body" idx="1"/>
+          </p:nvPr>
+        </p:nvSpPr>
+        <p:spPr>
+          <a:xfrm>
+            <a:off x="839788" y="1681163"/>
+            <a:ext cx="5157787" cy="823912"/>
+          </a:xfrm>
+        </p:spPr>
+        <p:txBody>
+          <a:bodyPr anchor="b"/>
           <a:lstStyle>
-            <a:lvl1pPr marL="0" indent="0" algn="ctr">
-              <a:buNone/>
-              <a:defRPr sz="1900" b="0" cap="all" spc="100" baseline="0">
-                <a:solidFill>
-                  <a:schemeClr val="accent2">
-                    <a:lumMod val="75000"/>
-                  </a:schemeClr>
-                </a:solidFill>
-              </a:defRPr>
+            <a:lvl1pPr marL="0" indent="0">
+              <a:buNone/>
+              <a:defRPr sz="2400" b="1"/>
             </a:lvl1pPr>
             <a:lvl2pPr marL="457200" indent="0">
               <a:buNone/>
-              <a:defRPr sz="1900" b="1"/>
+              <a:defRPr sz="2000" b="1"/>
             </a:lvl2pPr>
             <a:lvl3pPr marL="914400" indent="0">
               <a:buNone/>
@@ -1444,7 +1614,13 @@
       </p:sp>
       <p:sp>
         <p:nvSpPr>
-          <p:cNvPr id="4" name="Content Placeholder 3"/>
+          <p:cNvPr id="4" name="Content Placeholder 3">
+            <a:extLst>
+              <a:ext uri="{FF2B5EF4-FFF2-40B4-BE49-F238E27FC236}">
+                <a16:creationId xmlns:a16="http://schemas.microsoft.com/office/drawing/2014/main" id="{F9585582-C629-E388-BA49-2597AC3A2415}"/>
+              </a:ext>
+            </a:extLst>
+          </p:cNvPr>
           <p:cNvSpPr>
             <a:spLocks noGrp="1"/>
           </p:cNvSpPr>
@@ -1454,8 +1630,8 @@
         </p:nvSpPr>
         <p:spPr>
           <a:xfrm>
-            <a:off x="1583436" y="3143250"/>
-            <a:ext cx="4270248" cy="2596776"/>
+            <a:off x="839788" y="2505075"/>
+            <a:ext cx="5157787" cy="3684588"/>
           </a:xfrm>
         </p:spPr>
         <p:txBody>
@@ -1495,105 +1671,42 @@
               <a:rPr lang="en-US"/>
               <a:t>Fifth level</a:t>
             </a:r>
-            <a:endParaRPr lang="en-US" dirty="0"/>
-          </a:p>
-        </p:txBody>
-      </p:sp>
-      <p:sp>
-        <p:nvSpPr>
-          <p:cNvPr id="6" name="Content Placeholder 5"/>
-          <p:cNvSpPr>
-            <a:spLocks noGrp="1"/>
-          </p:cNvSpPr>
-          <p:nvPr>
-            <p:ph sz="quarter" idx="4"/>
+            <a:endParaRPr lang="en-TH"/>
+          </a:p>
+        </p:txBody>
+      </p:sp>
+      <p:sp>
+        <p:nvSpPr>
+          <p:cNvPr id="5" name="Text Placeholder 4">
+            <a:extLst>
+              <a:ext uri="{FF2B5EF4-FFF2-40B4-BE49-F238E27FC236}">
+                <a16:creationId xmlns:a16="http://schemas.microsoft.com/office/drawing/2014/main" id="{EFBB1386-E19F-2BD5-1FDA-4978E58A7CFA}"/>
+              </a:ext>
+            </a:extLst>
+          </p:cNvPr>
+          <p:cNvSpPr>
+            <a:spLocks noGrp="1"/>
+          </p:cNvSpPr>
+          <p:nvPr>
+            <p:ph type="body" sz="quarter" idx="3"/>
           </p:nvPr>
         </p:nvSpPr>
         <p:spPr>
           <a:xfrm>
-            <a:off x="6338316" y="3143250"/>
-            <a:ext cx="4253484" cy="2596776"/>
+            <a:off x="6172200" y="1681163"/>
+            <a:ext cx="5183188" cy="823912"/>
           </a:xfrm>
         </p:spPr>
         <p:txBody>
-          <a:bodyPr/>
+          <a:bodyPr anchor="b"/>
           <a:lstStyle>
-            <a:lvl5pPr>
-              <a:defRPr/>
-            </a:lvl5pPr>
-          </a:lstStyle>
-          <a:p>
-            <a:pPr lvl="0"/>
-            <a:r>
-              <a:rPr lang="en-US"/>
-              <a:t>Click to edit Master text styles</a:t>
-            </a:r>
-          </a:p>
-          <a:p>
-            <a:pPr lvl="1"/>
-            <a:r>
-              <a:rPr lang="en-US"/>
-              <a:t>Second level</a:t>
-            </a:r>
-          </a:p>
-          <a:p>
-            <a:pPr lvl="2"/>
-            <a:r>
-              <a:rPr lang="en-US"/>
-              <a:t>Third level</a:t>
-            </a:r>
-          </a:p>
-          <a:p>
-            <a:pPr lvl="3"/>
-            <a:r>
-              <a:rPr lang="en-US"/>
-              <a:t>Fourth level</a:t>
-            </a:r>
-          </a:p>
-          <a:p>
-            <a:pPr lvl="4"/>
-            <a:r>
-              <a:rPr lang="en-US"/>
-              <a:t>Fifth level</a:t>
-            </a:r>
-            <a:endParaRPr lang="en-US" dirty="0"/>
-          </a:p>
-        </p:txBody>
-      </p:sp>
-      <p:sp>
-        <p:nvSpPr>
-          <p:cNvPr id="11" name="Text Placeholder 4"/>
-          <p:cNvSpPr>
-            <a:spLocks noGrp="1"/>
-          </p:cNvSpPr>
-          <p:nvPr>
-            <p:ph type="body" sz="quarter" idx="13"/>
-          </p:nvPr>
-        </p:nvSpPr>
-        <p:spPr>
-          <a:xfrm>
-            <a:off x="6338316" y="2313433"/>
-            <a:ext cx="4270248" cy="704087"/>
-          </a:xfrm>
-        </p:spPr>
-        <p:txBody>
-          <a:bodyPr anchor="b" anchorCtr="1">
-            <a:normAutofit/>
-          </a:bodyPr>
-          <a:lstStyle>
-            <a:lvl1pPr marL="0" indent="0" algn="ctr">
-              <a:buNone/>
-              <a:defRPr sz="1900" b="0" cap="all" spc="100" baseline="0">
-                <a:solidFill>
-                  <a:schemeClr val="accent2">
-                    <a:lumMod val="75000"/>
-                  </a:schemeClr>
-                </a:solidFill>
-              </a:defRPr>
+            <a:lvl1pPr marL="0" indent="0">
+              <a:buNone/>
+              <a:defRPr sz="2400" b="1"/>
             </a:lvl1pPr>
             <a:lvl2pPr marL="457200" indent="0">
               <a:buNone/>
-              <a:defRPr sz="1900" b="1"/>
+              <a:defRPr sz="2000" b="1"/>
             </a:lvl2pPr>
             <a:lvl3pPr marL="914400" indent="0">
               <a:buNone/>
@@ -1635,7 +1748,76 @@
       </p:sp>
       <p:sp>
         <p:nvSpPr>
-          <p:cNvPr id="7" name="Date Placeholder 6"/>
+          <p:cNvPr id="6" name="Content Placeholder 5">
+            <a:extLst>
+              <a:ext uri="{FF2B5EF4-FFF2-40B4-BE49-F238E27FC236}">
+                <a16:creationId xmlns:a16="http://schemas.microsoft.com/office/drawing/2014/main" id="{341D9602-2EE2-31B3-4A2C-AE909337FBF6}"/>
+              </a:ext>
+            </a:extLst>
+          </p:cNvPr>
+          <p:cNvSpPr>
+            <a:spLocks noGrp="1"/>
+          </p:cNvSpPr>
+          <p:nvPr>
+            <p:ph sz="quarter" idx="4"/>
+          </p:nvPr>
+        </p:nvSpPr>
+        <p:spPr>
+          <a:xfrm>
+            <a:off x="6172200" y="2505075"/>
+            <a:ext cx="5183188" cy="3684588"/>
+          </a:xfrm>
+        </p:spPr>
+        <p:txBody>
+          <a:bodyPr/>
+          <a:lstStyle/>
+          <a:p>
+            <a:pPr lvl="0"/>
+            <a:r>
+              <a:rPr lang="en-US"/>
+              <a:t>Click to edit Master text styles</a:t>
+            </a:r>
+          </a:p>
+          <a:p>
+            <a:pPr lvl="1"/>
+            <a:r>
+              <a:rPr lang="en-US"/>
+              <a:t>Second level</a:t>
+            </a:r>
+          </a:p>
+          <a:p>
+            <a:pPr lvl="2"/>
+            <a:r>
+              <a:rPr lang="en-US"/>
+              <a:t>Third level</a:t>
+            </a:r>
+          </a:p>
+          <a:p>
+            <a:pPr lvl="3"/>
+            <a:r>
+              <a:rPr lang="en-US"/>
+              <a:t>Fourth level</a:t>
+            </a:r>
+          </a:p>
+          <a:p>
+            <a:pPr lvl="4"/>
+            <a:r>
+              <a:rPr lang="en-US"/>
+              <a:t>Fifth level</a:t>
+            </a:r>
+            <a:endParaRPr lang="en-TH"/>
+          </a:p>
+        </p:txBody>
+      </p:sp>
+      <p:sp>
+        <p:nvSpPr>
+          <p:cNvPr id="7" name="Date Placeholder 6">
+            <a:extLst>
+              <a:ext uri="{FF2B5EF4-FFF2-40B4-BE49-F238E27FC236}">
+                <a16:creationId xmlns:a16="http://schemas.microsoft.com/office/drawing/2014/main" id="{CEB7CF5B-A560-DC77-6572-7644FD0B9E21}"/>
+              </a:ext>
+            </a:extLst>
+          </p:cNvPr>
           <p:cNvSpPr>
             <a:spLocks noGrp="1"/>
           </p:cNvSpPr>
@@ -1658,7 +1840,13 @@
       </p:sp>
       <p:sp>
         <p:nvSpPr>
-          <p:cNvPr id="8" name="Footer Placeholder 7"/>
+          <p:cNvPr id="8" name="Footer Placeholder 7">
+            <a:extLst>
+              <a:ext uri="{FF2B5EF4-FFF2-40B4-BE49-F238E27FC236}">
+                <a16:creationId xmlns:a16="http://schemas.microsoft.com/office/drawing/2014/main" id="{6A3CE9BF-3D09-1915-D090-08EA6A831645}"/>
+              </a:ext>
+            </a:extLst>
+          </p:cNvPr>
           <p:cNvSpPr>
             <a:spLocks noGrp="1"/>
           </p:cNvSpPr>
@@ -1677,7 +1865,13 @@
       </p:sp>
       <p:sp>
         <p:nvSpPr>
-          <p:cNvPr id="9" name="Slide Number Placeholder 8"/>
+          <p:cNvPr id="9" name="Slide Number Placeholder 8">
+            <a:extLst>
+              <a:ext uri="{FF2B5EF4-FFF2-40B4-BE49-F238E27FC236}">
+                <a16:creationId xmlns:a16="http://schemas.microsoft.com/office/drawing/2014/main" id="{9E45BC0E-B5FD-D8EC-D88E-9D0E08DD8E76}"/>
+              </a:ext>
+            </a:extLst>
+          </p:cNvPr>
           <p:cNvSpPr>
             <a:spLocks noGrp="1"/>
           </p:cNvSpPr>
@@ -1698,33 +1892,10 @@
           </a:p>
         </p:txBody>
       </p:sp>
-      <p:sp>
-        <p:nvSpPr>
-          <p:cNvPr id="10" name="Title 9"/>
-          <p:cNvSpPr>
-            <a:spLocks noGrp="1"/>
-          </p:cNvSpPr>
-          <p:nvPr>
-            <p:ph type="title"/>
-          </p:nvPr>
-        </p:nvSpPr>
-        <p:spPr/>
-        <p:txBody>
-          <a:bodyPr/>
-          <a:lstStyle/>
-          <a:p>
-            <a:r>
-              <a:rPr lang="en-US"/>
-              <a:t>Click to edit Master title style</a:t>
-            </a:r>
-            <a:endParaRPr lang="en-US" dirty="0"/>
-          </a:p>
-        </p:txBody>
-      </p:sp>
     </p:spTree>
     <p:extLst>
       <p:ext uri="{BB962C8B-B14F-4D97-AF65-F5344CB8AC3E}">
-        <p14:creationId xmlns:p14="http://schemas.microsoft.com/office/powerpoint/2010/main" val="4223104396"/>
+        <p14:creationId xmlns:p14="http://schemas.microsoft.com/office/powerpoint/2010/main" val="2989644055"/>
       </p:ext>
     </p:extLst>
   </p:cSld>
@@ -1753,7 +1924,13 @@
       </p:grpSpPr>
       <p:sp>
         <p:nvSpPr>
-          <p:cNvPr id="2" name="Title 1"/>
+          <p:cNvPr id="2" name="Title 1">
+            <a:extLst>
+              <a:ext uri="{FF2B5EF4-FFF2-40B4-BE49-F238E27FC236}">
+                <a16:creationId xmlns:a16="http://schemas.microsoft.com/office/drawing/2014/main" id="{775A339F-E952-0222-DC81-E19BD78C95F0}"/>
+              </a:ext>
+            </a:extLst>
+          </p:cNvPr>
           <p:cNvSpPr>
             <a:spLocks noGrp="1"/>
           </p:cNvSpPr>
@@ -1770,13 +1947,19 @@
               <a:rPr lang="en-US"/>
               <a:t>Click to edit Master title style</a:t>
             </a:r>
-            <a:endParaRPr lang="en-US" dirty="0"/>
-          </a:p>
-        </p:txBody>
-      </p:sp>
-      <p:sp>
-        <p:nvSpPr>
-          <p:cNvPr id="3" name="Date Placeholder 2"/>
+            <a:endParaRPr lang="en-TH"/>
+          </a:p>
+        </p:txBody>
+      </p:sp>
+      <p:sp>
+        <p:nvSpPr>
+          <p:cNvPr id="3" name="Date Placeholder 2">
+            <a:extLst>
+              <a:ext uri="{FF2B5EF4-FFF2-40B4-BE49-F238E27FC236}">
+                <a16:creationId xmlns:a16="http://schemas.microsoft.com/office/drawing/2014/main" id="{EF0D38A9-671B-175B-8011-60595A95A805}"/>
+              </a:ext>
+            </a:extLst>
+          </p:cNvPr>
           <p:cNvSpPr>
             <a:spLocks noGrp="1"/>
           </p:cNvSpPr>
@@ -1799,7 +1982,13 @@
       </p:sp>
       <p:sp>
         <p:nvSpPr>
-          <p:cNvPr id="4" name="Footer Placeholder 3"/>
+          <p:cNvPr id="4" name="Footer Placeholder 3">
+            <a:extLst>
+              <a:ext uri="{FF2B5EF4-FFF2-40B4-BE49-F238E27FC236}">
+                <a16:creationId xmlns:a16="http://schemas.microsoft.com/office/drawing/2014/main" id="{CAF165E2-CADB-AF9C-5DA7-035E8C18AB16}"/>
+              </a:ext>
+            </a:extLst>
+          </p:cNvPr>
           <p:cNvSpPr>
             <a:spLocks noGrp="1"/>
           </p:cNvSpPr>
@@ -1818,7 +2007,13 @@
       </p:sp>
       <p:sp>
         <p:nvSpPr>
-          <p:cNvPr id="5" name="Slide Number Placeholder 4"/>
+          <p:cNvPr id="5" name="Slide Number Placeholder 4">
+            <a:extLst>
+              <a:ext uri="{FF2B5EF4-FFF2-40B4-BE49-F238E27FC236}">
+                <a16:creationId xmlns:a16="http://schemas.microsoft.com/office/drawing/2014/main" id="{97580BEA-CC1E-830E-9E51-32E5568A0B5B}"/>
+              </a:ext>
+            </a:extLst>
+          </p:cNvPr>
           <p:cNvSpPr>
             <a:spLocks noGrp="1"/>
           </p:cNvSpPr>
@@ -1842,7 +2037,7 @@
     </p:spTree>
     <p:extLst>
       <p:ext uri="{BB962C8B-B14F-4D97-AF65-F5344CB8AC3E}">
-        <p14:creationId xmlns:p14="http://schemas.microsoft.com/office/powerpoint/2010/main" val="3245985032"/>
+        <p14:creationId xmlns:p14="http://schemas.microsoft.com/office/powerpoint/2010/main" val="3849292434"/>
       </p:ext>
     </p:extLst>
   </p:cSld>
@@ -1871,7 +2066,13 @@
       </p:grpSpPr>
       <p:sp>
         <p:nvSpPr>
-          <p:cNvPr id="2" name="Date Placeholder 1"/>
+          <p:cNvPr id="2" name="Date Placeholder 1">
+            <a:extLst>
+              <a:ext uri="{FF2B5EF4-FFF2-40B4-BE49-F238E27FC236}">
+                <a16:creationId xmlns:a16="http://schemas.microsoft.com/office/drawing/2014/main" id="{34CFF401-BB71-8962-2DCD-D2DC2614F5CD}"/>
+              </a:ext>
+            </a:extLst>
+          </p:cNvPr>
           <p:cNvSpPr>
             <a:spLocks noGrp="1"/>
           </p:cNvSpPr>
@@ -1894,7 +2095,13 @@
       </p:sp>
       <p:sp>
         <p:nvSpPr>
-          <p:cNvPr id="3" name="Footer Placeholder 2"/>
+          <p:cNvPr id="3" name="Footer Placeholder 2">
+            <a:extLst>
+              <a:ext uri="{FF2B5EF4-FFF2-40B4-BE49-F238E27FC236}">
+                <a16:creationId xmlns:a16="http://schemas.microsoft.com/office/drawing/2014/main" id="{A24DBB16-4B06-271C-75D1-2A25D6459975}"/>
+              </a:ext>
+            </a:extLst>
+          </p:cNvPr>
           <p:cNvSpPr>
             <a:spLocks noGrp="1"/>
           </p:cNvSpPr>
@@ -1913,7 +2120,13 @@
       </p:sp>
       <p:sp>
         <p:nvSpPr>
-          <p:cNvPr id="4" name="Slide Number Placeholder 3"/>
+          <p:cNvPr id="4" name="Slide Number Placeholder 3">
+            <a:extLst>
+              <a:ext uri="{FF2B5EF4-FFF2-40B4-BE49-F238E27FC236}">
+                <a16:creationId xmlns:a16="http://schemas.microsoft.com/office/drawing/2014/main" id="{166D4C28-15B3-E6DD-4428-52DD78F9E4ED}"/>
+              </a:ext>
+            </a:extLst>
+          </p:cNvPr>
           <p:cNvSpPr>
             <a:spLocks noGrp="1"/>
           </p:cNvSpPr>
@@ -1937,7 +2150,7 @@
     </p:spTree>
     <p:extLst>
       <p:ext uri="{BB962C8B-B14F-4D97-AF65-F5344CB8AC3E}">
-        <p14:creationId xmlns:p14="http://schemas.microsoft.com/office/powerpoint/2010/main" val="3437640002"/>
+        <p14:creationId xmlns:p14="http://schemas.microsoft.com/office/powerpoint/2010/main" val="3139265488"/>
       </p:ext>
     </p:extLst>
   </p:cSld>
@@ -1966,77 +2179,31 @@
       </p:grpSpPr>
       <p:sp>
         <p:nvSpPr>
-          <p:cNvPr id="26" name="Rectangle 25"/>
-          <p:cNvSpPr/>
-          <p:nvPr/>
+          <p:cNvPr id="2" name="Title 1">
+            <a:extLst>
+              <a:ext uri="{FF2B5EF4-FFF2-40B4-BE49-F238E27FC236}">
+                <a16:creationId xmlns:a16="http://schemas.microsoft.com/office/drawing/2014/main" id="{D38FC816-7CD4-715B-0C15-637F522FA414}"/>
+              </a:ext>
+            </a:extLst>
+          </p:cNvPr>
+          <p:cNvSpPr>
+            <a:spLocks noGrp="1"/>
+          </p:cNvSpPr>
+          <p:nvPr>
+            <p:ph type="title"/>
+          </p:nvPr>
         </p:nvSpPr>
         <p:spPr>
           <a:xfrm>
-            <a:off x="0" y="0"/>
-            <a:ext cx="6096000" cy="6858000"/>
+            <a:off x="839788" y="457200"/>
+            <a:ext cx="3932237" cy="1600200"/>
           </a:xfrm>
-          <a:prstGeom prst="rect">
-            <a:avLst/>
-          </a:prstGeom>
-          <a:solidFill>
-            <a:schemeClr val="accent2"/>
-          </a:solidFill>
-          <a:ln>
-            <a:noFill/>
-          </a:ln>
         </p:spPr>
-        <p:style>
-          <a:lnRef idx="2">
-            <a:schemeClr val="accent1">
-              <a:shade val="50000"/>
-            </a:schemeClr>
-          </a:lnRef>
-          <a:fillRef idx="1">
-            <a:schemeClr val="accent1"/>
-          </a:fillRef>
-          <a:effectRef idx="0">
-            <a:schemeClr val="accent1"/>
-          </a:effectRef>
-          <a:fontRef idx="minor">
-            <a:schemeClr val="lt1"/>
-          </a:fontRef>
-        </p:style>
-      </p:sp>
-      <p:sp>
-        <p:nvSpPr>
-          <p:cNvPr id="2" name="Title 1"/>
-          <p:cNvSpPr>
-            <a:spLocks noGrp="1"/>
-          </p:cNvSpPr>
-          <p:nvPr>
-            <p:ph type="title"/>
-          </p:nvPr>
-        </p:nvSpPr>
-        <p:spPr bwMode="blackWhite">
-          <a:xfrm>
-            <a:off x="804672" y="2243828"/>
-            <a:ext cx="4486656" cy="1141497"/>
-          </a:xfrm>
-          <a:solidFill>
-            <a:srgbClr val="FFFFFF"/>
-          </a:solidFill>
-          <a:ln>
-            <a:solidFill>
-              <a:srgbClr val="404040"/>
-            </a:solidFill>
-          </a:ln>
-        </p:spPr>
-        <p:txBody>
-          <a:bodyPr anchor="ctr" anchorCtr="1">
-            <a:normAutofit/>
-          </a:bodyPr>
+        <p:txBody>
+          <a:bodyPr anchor="b"/>
           <a:lstStyle>
             <a:lvl1pPr>
-              <a:defRPr sz="2200">
-                <a:solidFill>
-                  <a:srgbClr val="262626"/>
-                </a:solidFill>
-              </a:defRPr>
+              <a:defRPr sz="3200"/>
             </a:lvl1pPr>
           </a:lstStyle>
           <a:p>
@@ -2044,13 +2211,19 @@
               <a:rPr lang="en-US"/>
               <a:t>Click to edit Master title style</a:t>
             </a:r>
-            <a:endParaRPr lang="en-US" dirty="0"/>
-          </a:p>
-        </p:txBody>
-      </p:sp>
-      <p:sp>
-        <p:nvSpPr>
-          <p:cNvPr id="3" name="Content Placeholder 2"/>
+            <a:endParaRPr lang="en-TH"/>
+          </a:p>
+        </p:txBody>
+      </p:sp>
+      <p:sp>
+        <p:nvSpPr>
+          <p:cNvPr id="3" name="Content Placeholder 2">
+            <a:extLst>
+              <a:ext uri="{FF2B5EF4-FFF2-40B4-BE49-F238E27FC236}">
+                <a16:creationId xmlns:a16="http://schemas.microsoft.com/office/drawing/2014/main" id="{9D525B6F-86A2-7D6D-764E-1F96B7E4D860}"/>
+              </a:ext>
+            </a:extLst>
+          </p:cNvPr>
           <p:cNvSpPr>
             <a:spLocks noGrp="1"/>
           </p:cNvSpPr>
@@ -2060,61 +2233,39 @@
         </p:nvSpPr>
         <p:spPr>
           <a:xfrm>
-            <a:off x="6736080" y="804672"/>
-            <a:ext cx="4815840" cy="5248656"/>
+            <a:off x="5183188" y="987425"/>
+            <a:ext cx="6172200" cy="4873625"/>
           </a:xfrm>
         </p:spPr>
         <p:txBody>
-          <a:bodyPr>
-            <a:normAutofit/>
-          </a:bodyPr>
+          <a:bodyPr/>
           <a:lstStyle>
             <a:lvl1pPr>
-              <a:defRPr sz="1900">
-                <a:solidFill>
-                  <a:schemeClr val="tx1"/>
-                </a:solidFill>
-              </a:defRPr>
+              <a:defRPr sz="3200"/>
             </a:lvl1pPr>
             <a:lvl2pPr>
-              <a:defRPr sz="1600">
-                <a:solidFill>
-                  <a:schemeClr val="tx1"/>
-                </a:solidFill>
-              </a:defRPr>
+              <a:defRPr sz="2800"/>
             </a:lvl2pPr>
             <a:lvl3pPr>
-              <a:defRPr sz="1600">
-                <a:solidFill>
-                  <a:schemeClr val="tx1"/>
-                </a:solidFill>
-              </a:defRPr>
+              <a:defRPr sz="2400"/>
             </a:lvl3pPr>
             <a:lvl4pPr>
-              <a:defRPr sz="1600">
-                <a:solidFill>
-                  <a:schemeClr val="tx1"/>
-                </a:solidFill>
-              </a:defRPr>
+              <a:defRPr sz="2000"/>
             </a:lvl4pPr>
             <a:lvl5pPr>
-              <a:defRPr sz="1600">
-                <a:solidFill>
-                  <a:schemeClr val="tx1"/>
-                </a:solidFill>
-              </a:defRPr>
+              <a:defRPr sz="2000"/>
             </a:lvl5pPr>
             <a:lvl6pPr>
-              <a:defRPr sz="1600"/>
+              <a:defRPr sz="2000"/>
             </a:lvl6pPr>
             <a:lvl7pPr>
-              <a:defRPr sz="1600"/>
+              <a:defRPr sz="2000"/>
             </a:lvl7pPr>
             <a:lvl8pPr>
-              <a:defRPr sz="1600"/>
+              <a:defRPr sz="2000"/>
             </a:lvl8pPr>
             <a:lvl9pPr>
-              <a:defRPr sz="1600"/>
+              <a:defRPr sz="2000"/>
             </a:lvl9pPr>
           </a:lstStyle>
           <a:p>
@@ -2151,13 +2302,19 @@
               <a:rPr lang="en-US"/>
               <a:t>Fifth level</a:t>
             </a:r>
-            <a:endParaRPr lang="en-US" dirty="0"/>
-          </a:p>
-        </p:txBody>
-      </p:sp>
-      <p:sp>
-        <p:nvSpPr>
-          <p:cNvPr id="4" name="Text Placeholder 3"/>
+            <a:endParaRPr lang="en-TH"/>
+          </a:p>
+        </p:txBody>
+      </p:sp>
+      <p:sp>
+        <p:nvSpPr>
+          <p:cNvPr id="4" name="Text Placeholder 3">
+            <a:extLst>
+              <a:ext uri="{FF2B5EF4-FFF2-40B4-BE49-F238E27FC236}">
+                <a16:creationId xmlns:a16="http://schemas.microsoft.com/office/drawing/2014/main" id="{D0A2A083-C29B-63D9-A11F-5514B7EF2665}"/>
+              </a:ext>
+            </a:extLst>
+          </p:cNvPr>
           <p:cNvSpPr>
             <a:spLocks noGrp="1"/>
           </p:cNvSpPr>
@@ -2167,22 +2324,16 @@
         </p:nvSpPr>
         <p:spPr>
           <a:xfrm>
-            <a:off x="1115568" y="3549918"/>
-            <a:ext cx="3794760" cy="2194036"/>
+            <a:off x="839788" y="2057400"/>
+            <a:ext cx="3932237" cy="3811588"/>
           </a:xfrm>
         </p:spPr>
         <p:txBody>
-          <a:bodyPr anchor="t" anchorCtr="1">
-            <a:normAutofit/>
-          </a:bodyPr>
+          <a:bodyPr/>
           <a:lstStyle>
-            <a:lvl1pPr marL="0" indent="0" algn="ctr">
-              <a:buNone/>
-              <a:defRPr sz="1500">
-                <a:solidFill>
-                  <a:srgbClr val="FFFFFF"/>
-                </a:solidFill>
-              </a:defRPr>
+            <a:lvl1pPr marL="0" indent="0">
+              <a:buNone/>
+              <a:defRPr sz="1600"/>
             </a:lvl1pPr>
             <a:lvl2pPr marL="457200" indent="0">
               <a:buNone/>
@@ -2228,7 +2379,13 @@
       </p:sp>
       <p:sp>
         <p:nvSpPr>
-          <p:cNvPr id="9" name="Date Placeholder 8"/>
+          <p:cNvPr id="5" name="Date Placeholder 4">
+            <a:extLst>
+              <a:ext uri="{FF2B5EF4-FFF2-40B4-BE49-F238E27FC236}">
+                <a16:creationId xmlns:a16="http://schemas.microsoft.com/office/drawing/2014/main" id="{601AA690-F795-1830-362D-6B4013BC47E3}"/>
+              </a:ext>
+            </a:extLst>
+          </p:cNvPr>
           <p:cNvSpPr>
             <a:spLocks noGrp="1"/>
           </p:cNvSpPr>
@@ -2251,7 +2408,13 @@
       </p:sp>
       <p:sp>
         <p:nvSpPr>
-          <p:cNvPr id="10" name="Footer Placeholder 9"/>
+          <p:cNvPr id="6" name="Footer Placeholder 5">
+            <a:extLst>
+              <a:ext uri="{FF2B5EF4-FFF2-40B4-BE49-F238E27FC236}">
+                <a16:creationId xmlns:a16="http://schemas.microsoft.com/office/drawing/2014/main" id="{C3618582-5947-D31B-C34E-9FB620740B3A}"/>
+              </a:ext>
+            </a:extLst>
+          </p:cNvPr>
           <p:cNvSpPr>
             <a:spLocks noGrp="1"/>
           </p:cNvSpPr>
@@ -2259,33 +2422,24 @@
             <p:ph type="ftr" sz="quarter" idx="11"/>
           </p:nvPr>
         </p:nvSpPr>
-        <p:spPr>
-          <a:xfrm>
-            <a:off x="804672" y="6236208"/>
-            <a:ext cx="5124797" cy="320040"/>
-          </a:xfrm>
-        </p:spPr>
-        <p:txBody>
-          <a:bodyPr/>
-          <a:lstStyle>
-            <a:lvl1pPr>
-              <a:defRPr>
-                <a:solidFill>
-                  <a:srgbClr val="FFFFFF">
-                    <a:alpha val="70000"/>
-                  </a:srgbClr>
-                </a:solidFill>
-              </a:defRPr>
-            </a:lvl1pPr>
-          </a:lstStyle>
-          <a:p>
-            <a:endParaRPr lang="en-TH"/>
-          </a:p>
-        </p:txBody>
-      </p:sp>
-      <p:sp>
-        <p:nvSpPr>
-          <p:cNvPr id="11" name="Slide Number Placeholder 10"/>
+        <p:spPr/>
+        <p:txBody>
+          <a:bodyPr/>
+          <a:lstStyle/>
+          <a:p>
+            <a:endParaRPr lang="en-TH"/>
+          </a:p>
+        </p:txBody>
+      </p:sp>
+      <p:sp>
+        <p:nvSpPr>
+          <p:cNvPr id="7" name="Slide Number Placeholder 6">
+            <a:extLst>
+              <a:ext uri="{FF2B5EF4-FFF2-40B4-BE49-F238E27FC236}">
+                <a16:creationId xmlns:a16="http://schemas.microsoft.com/office/drawing/2014/main" id="{B7B55DE5-2F58-3212-BEFA-04E40AFD4CE5}"/>
+              </a:ext>
+            </a:extLst>
+          </p:cNvPr>
           <p:cNvSpPr>
             <a:spLocks noGrp="1"/>
           </p:cNvSpPr>
@@ -2309,7 +2463,7 @@
     </p:spTree>
     <p:extLst>
       <p:ext uri="{BB962C8B-B14F-4D97-AF65-F5344CB8AC3E}">
-        <p14:creationId xmlns:p14="http://schemas.microsoft.com/office/powerpoint/2010/main" val="3362923922"/>
+        <p14:creationId xmlns:p14="http://schemas.microsoft.com/office/powerpoint/2010/main" val="294791409"/>
       </p:ext>
     </p:extLst>
   </p:cSld>
@@ -2338,77 +2492,31 @@
       </p:grpSpPr>
       <p:sp>
         <p:nvSpPr>
-          <p:cNvPr id="18" name="Rectangle 17"/>
-          <p:cNvSpPr/>
-          <p:nvPr/>
+          <p:cNvPr id="2" name="Title 1">
+            <a:extLst>
+              <a:ext uri="{FF2B5EF4-FFF2-40B4-BE49-F238E27FC236}">
+                <a16:creationId xmlns:a16="http://schemas.microsoft.com/office/drawing/2014/main" id="{64DECFA6-A3FA-A9C3-6BD1-A149D8323EE8}"/>
+              </a:ext>
+            </a:extLst>
+          </p:cNvPr>
+          <p:cNvSpPr>
+            <a:spLocks noGrp="1"/>
+          </p:cNvSpPr>
+          <p:nvPr>
+            <p:ph type="title"/>
+          </p:nvPr>
         </p:nvSpPr>
         <p:spPr>
           <a:xfrm>
-            <a:off x="0" y="0"/>
-            <a:ext cx="6095999" cy="6858000"/>
+            <a:off x="839788" y="457200"/>
+            <a:ext cx="3932237" cy="1600200"/>
           </a:xfrm>
-          <a:prstGeom prst="rect">
-            <a:avLst/>
-          </a:prstGeom>
-          <a:solidFill>
-            <a:schemeClr val="accent2"/>
-          </a:solidFill>
-          <a:ln>
-            <a:noFill/>
-          </a:ln>
         </p:spPr>
-        <p:style>
-          <a:lnRef idx="2">
-            <a:schemeClr val="accent1">
-              <a:shade val="50000"/>
-            </a:schemeClr>
-          </a:lnRef>
-          <a:fillRef idx="1">
-            <a:schemeClr val="accent1"/>
-          </a:fillRef>
-          <a:effectRef idx="0">
-            <a:schemeClr val="accent1"/>
-          </a:effectRef>
-          <a:fontRef idx="minor">
-            <a:schemeClr val="lt1"/>
-          </a:fontRef>
-        </p:style>
-      </p:sp>
-      <p:sp>
-        <p:nvSpPr>
-          <p:cNvPr id="2" name="Title 1"/>
-          <p:cNvSpPr>
-            <a:spLocks noGrp="1"/>
-          </p:cNvSpPr>
-          <p:nvPr>
-            <p:ph type="title"/>
-          </p:nvPr>
-        </p:nvSpPr>
-        <p:spPr bwMode="blackWhite">
-          <a:xfrm>
-            <a:off x="808523" y="2243828"/>
-            <a:ext cx="4494998" cy="1134640"/>
-          </a:xfrm>
-          <a:solidFill>
-            <a:srgbClr val="FFFFFF"/>
-          </a:solidFill>
-          <a:ln>
-            <a:solidFill>
-              <a:srgbClr val="404040"/>
-            </a:solidFill>
-          </a:ln>
-        </p:spPr>
-        <p:txBody>
-          <a:bodyPr anchor="ctr" anchorCtr="1">
-            <a:noAutofit/>
-          </a:bodyPr>
+        <p:txBody>
+          <a:bodyPr anchor="b"/>
           <a:lstStyle>
             <a:lvl1pPr>
-              <a:defRPr sz="2200">
-                <a:solidFill>
-                  <a:srgbClr val="262626"/>
-                </a:solidFill>
-              </a:defRPr>
+              <a:defRPr sz="3200"/>
             </a:lvl1pPr>
           </a:lstStyle>
           <a:p>
@@ -2416,15 +2524,21 @@
               <a:rPr lang="en-US"/>
               <a:t>Click to edit Master title style</a:t>
             </a:r>
-            <a:endParaRPr lang="en-US" dirty="0"/>
-          </a:p>
-        </p:txBody>
-      </p:sp>
-      <p:sp>
-        <p:nvSpPr>
-          <p:cNvPr id="3" name="Picture Placeholder 2"/>
-          <p:cNvSpPr>
-            <a:spLocks noGrp="1" noChangeAspect="1"/>
+            <a:endParaRPr lang="en-TH"/>
+          </a:p>
+        </p:txBody>
+      </p:sp>
+      <p:sp>
+        <p:nvSpPr>
+          <p:cNvPr id="3" name="Picture Placeholder 2">
+            <a:extLst>
+              <a:ext uri="{FF2B5EF4-FFF2-40B4-BE49-F238E27FC236}">
+                <a16:creationId xmlns:a16="http://schemas.microsoft.com/office/drawing/2014/main" id="{DC38BFD0-1A01-6091-6452-FBE00FB53FF2}"/>
+              </a:ext>
+            </a:extLst>
+          </p:cNvPr>
+          <p:cNvSpPr>
+            <a:spLocks noGrp="1"/>
           </p:cNvSpPr>
           <p:nvPr>
             <p:ph type="pic" idx="1"/>
@@ -2432,28 +2546,16 @@
         </p:nvSpPr>
         <p:spPr>
           <a:xfrm>
-            <a:off x="6095999" y="0"/>
-            <a:ext cx="6102097" cy="6858000"/>
+            <a:off x="5183188" y="987425"/>
+            <a:ext cx="6172200" cy="4873625"/>
           </a:xfrm>
-          <a:solidFill>
-            <a:schemeClr val="bg1">
-              <a:lumMod val="75000"/>
-            </a:schemeClr>
-          </a:solidFill>
         </p:spPr>
         <p:txBody>
-          <a:bodyPr anchor="t"/>
+          <a:bodyPr/>
           <a:lstStyle>
             <a:lvl1pPr marL="0" indent="0">
               <a:buNone/>
-              <a:defRPr sz="3200">
-                <a:solidFill>
-                  <a:schemeClr val="bg1">
-                    <a:lumMod val="85000"/>
-                    <a:lumOff val="15000"/>
-                  </a:schemeClr>
-                </a:solidFill>
-              </a:defRPr>
+              <a:defRPr sz="3200"/>
             </a:lvl1pPr>
             <a:lvl2pPr marL="457200" indent="0">
               <a:buNone/>
@@ -2489,17 +2591,19 @@
             </a:lvl9pPr>
           </a:lstStyle>
           <a:p>
-            <a:r>
-              <a:rPr lang="en-US"/>
-              <a:t>Click icon to add picture</a:t>
-            </a:r>
-            <a:endParaRPr lang="en-US" dirty="0"/>
-          </a:p>
-        </p:txBody>
-      </p:sp>
-      <p:sp>
-        <p:nvSpPr>
-          <p:cNvPr id="4" name="Text Placeholder 3"/>
+            <a:endParaRPr lang="en-TH"/>
+          </a:p>
+        </p:txBody>
+      </p:sp>
+      <p:sp>
+        <p:nvSpPr>
+          <p:cNvPr id="4" name="Text Placeholder 3">
+            <a:extLst>
+              <a:ext uri="{FF2B5EF4-FFF2-40B4-BE49-F238E27FC236}">
+                <a16:creationId xmlns:a16="http://schemas.microsoft.com/office/drawing/2014/main" id="{B0487061-9A91-D363-659D-710A6DA91FBB}"/>
+              </a:ext>
+            </a:extLst>
+          </p:cNvPr>
           <p:cNvSpPr>
             <a:spLocks noGrp="1"/>
           </p:cNvSpPr>
@@ -2509,22 +2613,16 @@
         </p:nvSpPr>
         <p:spPr>
           <a:xfrm>
-            <a:off x="1115568" y="3549918"/>
-            <a:ext cx="3794760" cy="2194037"/>
+            <a:off x="839788" y="2057400"/>
+            <a:ext cx="3932237" cy="3811588"/>
           </a:xfrm>
         </p:spPr>
         <p:txBody>
-          <a:bodyPr anchor="t" anchorCtr="1">
-            <a:normAutofit/>
-          </a:bodyPr>
+          <a:bodyPr/>
           <a:lstStyle>
-            <a:lvl1pPr marL="0" indent="0" algn="ctr">
-              <a:buNone/>
-              <a:defRPr sz="1500">
-                <a:solidFill>
-                  <a:srgbClr val="FFFFFF"/>
-                </a:solidFill>
-              </a:defRPr>
+            <a:lvl1pPr marL="0" indent="0">
+              <a:buNone/>
+              <a:defRPr sz="1600"/>
             </a:lvl1pPr>
             <a:lvl2pPr marL="457200" indent="0">
               <a:buNone/>
@@ -2570,7 +2668,13 @@
       </p:sp>
       <p:sp>
         <p:nvSpPr>
-          <p:cNvPr id="8" name="Date Placeholder 7"/>
+          <p:cNvPr id="5" name="Date Placeholder 4">
+            <a:extLst>
+              <a:ext uri="{FF2B5EF4-FFF2-40B4-BE49-F238E27FC236}">
+                <a16:creationId xmlns:a16="http://schemas.microsoft.com/office/drawing/2014/main" id="{D85AE467-9936-2D45-1535-C4BAE8C612BD}"/>
+              </a:ext>
+            </a:extLst>
+          </p:cNvPr>
           <p:cNvSpPr>
             <a:spLocks noGrp="1"/>
           </p:cNvSpPr>
@@ -2581,22 +2685,7 @@
         <p:spPr/>
         <p:txBody>
           <a:bodyPr/>
-          <a:lstStyle>
-            <a:lvl1pPr>
-              <a:defRPr>
-                <a:solidFill>
-                  <a:srgbClr val="FFFFFF"/>
-                </a:solidFill>
-                <a:effectLst>
-                  <a:outerShdw blurRad="50800" dist="38100" dir="2700000" algn="tl" rotWithShape="0">
-                    <a:prstClr val="black">
-                      <a:alpha val="43000"/>
-                    </a:prstClr>
-                  </a:outerShdw>
-                </a:effectLst>
-              </a:defRPr>
-            </a:lvl1pPr>
-          </a:lstStyle>
+          <a:lstStyle/>
           <a:p>
             <a:fld id="{CAFD788F-134A-A74B-810A-CD2D2393E82C}" type="datetimeFigureOut">
               <a:rPr lang="en-TH" smtClean="0"/>
@@ -2608,7 +2697,13 @@
       </p:sp>
       <p:sp>
         <p:nvSpPr>
-          <p:cNvPr id="9" name="Footer Placeholder 8"/>
+          <p:cNvPr id="6" name="Footer Placeholder 5">
+            <a:extLst>
+              <a:ext uri="{FF2B5EF4-FFF2-40B4-BE49-F238E27FC236}">
+                <a16:creationId xmlns:a16="http://schemas.microsoft.com/office/drawing/2014/main" id="{10D8BEFD-087D-68FF-B86A-32CA7780416F}"/>
+              </a:ext>
+            </a:extLst>
+          </p:cNvPr>
           <p:cNvSpPr>
             <a:spLocks noGrp="1"/>
           </p:cNvSpPr>
@@ -2616,33 +2711,24 @@
             <p:ph type="ftr" sz="quarter" idx="11"/>
           </p:nvPr>
         </p:nvSpPr>
-        <p:spPr>
-          <a:xfrm>
-            <a:off x="804672" y="6236208"/>
-            <a:ext cx="5124797" cy="320040"/>
-          </a:xfrm>
-        </p:spPr>
-        <p:txBody>
-          <a:bodyPr/>
-          <a:lstStyle>
-            <a:lvl1pPr>
-              <a:defRPr>
-                <a:solidFill>
-                  <a:srgbClr val="FFFFFF">
-                    <a:alpha val="70000"/>
-                  </a:srgbClr>
-                </a:solidFill>
-              </a:defRPr>
-            </a:lvl1pPr>
-          </a:lstStyle>
-          <a:p>
-            <a:endParaRPr lang="en-TH"/>
-          </a:p>
-        </p:txBody>
-      </p:sp>
-      <p:sp>
-        <p:nvSpPr>
-          <p:cNvPr id="10" name="Slide Number Placeholder 9"/>
+        <p:spPr/>
+        <p:txBody>
+          <a:bodyPr/>
+          <a:lstStyle/>
+          <a:p>
+            <a:endParaRPr lang="en-TH"/>
+          </a:p>
+        </p:txBody>
+      </p:sp>
+      <p:sp>
+        <p:nvSpPr>
+          <p:cNvPr id="7" name="Slide Number Placeholder 6">
+            <a:extLst>
+              <a:ext uri="{FF2B5EF4-FFF2-40B4-BE49-F238E27FC236}">
+                <a16:creationId xmlns:a16="http://schemas.microsoft.com/office/drawing/2014/main" id="{FAE9877E-E6C8-070F-A139-689C7BAA6117}"/>
+              </a:ext>
+            </a:extLst>
+          </p:cNvPr>
           <p:cNvSpPr>
             <a:spLocks noGrp="1"/>
           </p:cNvSpPr>
@@ -2666,7 +2752,7 @@
     </p:spTree>
     <p:extLst>
       <p:ext uri="{BB962C8B-B14F-4D97-AF65-F5344CB8AC3E}">
-        <p14:creationId xmlns:p14="http://schemas.microsoft.com/office/powerpoint/2010/main" val="1999950531"/>
+        <p14:creationId xmlns:p14="http://schemas.microsoft.com/office/powerpoint/2010/main" val="1603525056"/>
       </p:ext>
     </p:extLst>
   </p:cSld>
@@ -2680,14 +2766,9 @@
 <p:sldMaster xmlns:a="http://schemas.openxmlformats.org/drawingml/2006/main" xmlns:r="http://schemas.openxmlformats.org/officeDocument/2006/relationships" xmlns:p="http://schemas.openxmlformats.org/presentationml/2006/main">
   <p:cSld>
     <p:bg>
-      <p:bgPr>
-        <a:solidFill>
-          <a:schemeClr val="bg1">
-            <a:lumMod val="95000"/>
-          </a:schemeClr>
-        </a:solidFill>
-        <a:effectLst/>
-      </p:bgPr>
+      <p:bgRef idx="1001">
+        <a:schemeClr val="bg1"/>
+      </p:bgRef>
     </p:bg>
     <p:spTree>
       <p:nvGrpSpPr>
@@ -2705,135 +2786,144 @@
       </p:grpSpPr>
       <p:sp>
         <p:nvSpPr>
-          <p:cNvPr id="2" name="Title Placeholder 1"/>
+          <p:cNvPr id="2" name="Title Placeholder 1">
+            <a:extLst>
+              <a:ext uri="{FF2B5EF4-FFF2-40B4-BE49-F238E27FC236}">
+                <a16:creationId xmlns:a16="http://schemas.microsoft.com/office/drawing/2014/main" id="{4234A5B2-34BC-DE51-C31C-0BD0812938E5}"/>
+              </a:ext>
+            </a:extLst>
+          </p:cNvPr>
           <p:cNvSpPr>
             <a:spLocks noGrp="1"/>
           </p:cNvSpPr>
           <p:nvPr>
             <p:ph type="title"/>
-          </p:nvPr>
-        </p:nvSpPr>
-        <p:spPr bwMode="black">
-          <a:xfrm>
-            <a:off x="2231136" y="964692"/>
-            <a:ext cx="7729728" cy="1188720"/>
-          </a:xfrm>
-          <a:prstGeom prst="rect">
-            <a:avLst/>
-          </a:prstGeom>
-          <a:solidFill>
-            <a:srgbClr val="FFFFFF"/>
-          </a:solidFill>
-          <a:ln w="31750" cap="sq">
-            <a:solidFill>
-              <a:srgbClr val="404040"/>
-            </a:solidFill>
-            <a:miter lim="800000"/>
-          </a:ln>
-        </p:spPr>
-        <p:txBody>
-          <a:bodyPr vert="horz" lIns="182880" tIns="182880" rIns="182880" bIns="182880" rtlCol="0" anchor="ctr">
-            <a:normAutofit/>
-          </a:bodyPr>
-          <a:lstStyle/>
-          <a:p>
-            <a:r>
-              <a:rPr lang="en-US"/>
-              <a:t>Click to edit Master title style</a:t>
-            </a:r>
-            <a:endParaRPr lang="en-US" dirty="0"/>
-          </a:p>
-        </p:txBody>
-      </p:sp>
-      <p:sp>
-        <p:nvSpPr>
-          <p:cNvPr id="3" name="Text Placeholder 2"/>
-          <p:cNvSpPr>
-            <a:spLocks noGrp="1"/>
-          </p:cNvSpPr>
-          <p:nvPr>
-            <p:ph type="body" idx="1"/>
           </p:nvPr>
         </p:nvSpPr>
         <p:spPr>
           <a:xfrm>
-            <a:off x="2231136" y="2638044"/>
-            <a:ext cx="7729728" cy="3101983"/>
+            <a:off x="838200" y="365125"/>
+            <a:ext cx="10515600" cy="1325563"/>
           </a:xfrm>
           <a:prstGeom prst="rect">
             <a:avLst/>
           </a:prstGeom>
         </p:spPr>
         <p:txBody>
-          <a:bodyPr vert="horz" lIns="91440" tIns="45720" rIns="91440" bIns="45720" rtlCol="0">
+          <a:bodyPr vert="horz" lIns="91440" tIns="45720" rIns="91440" bIns="45720" rtlCol="0" anchor="ctr">
             <a:normAutofit/>
           </a:bodyPr>
           <a:lstStyle/>
           <a:p>
-            <a:pPr lvl="0"/>
-            <a:r>
-              <a:rPr lang="en-US"/>
-              <a:t>Click to edit Master text styles</a:t>
-            </a:r>
-          </a:p>
-          <a:p>
-            <a:pPr lvl="1"/>
-            <a:r>
-              <a:rPr lang="en-US"/>
-              <a:t>Second level</a:t>
-            </a:r>
-          </a:p>
-          <a:p>
-            <a:pPr lvl="2"/>
-            <a:r>
-              <a:rPr lang="en-US"/>
-              <a:t>Third level</a:t>
-            </a:r>
-          </a:p>
-          <a:p>
-            <a:pPr lvl="3"/>
-            <a:r>
-              <a:rPr lang="en-US"/>
-              <a:t>Fourth level</a:t>
-            </a:r>
-          </a:p>
-          <a:p>
-            <a:pPr lvl="4"/>
-            <a:r>
-              <a:rPr lang="en-US"/>
-              <a:t>Fifth level</a:t>
-            </a:r>
-            <a:endParaRPr lang="en-US" dirty="0"/>
-          </a:p>
-        </p:txBody>
-      </p:sp>
-      <p:sp>
-        <p:nvSpPr>
-          <p:cNvPr id="4" name="Date Placeholder 3"/>
-          <p:cNvSpPr>
-            <a:spLocks noGrp="1"/>
-          </p:cNvSpPr>
-          <p:nvPr>
-            <p:ph type="dt" sz="half" idx="2"/>
+            <a:r>
+              <a:rPr lang="en-US"/>
+              <a:t>Click to edit Master title style</a:t>
+            </a:r>
+            <a:endParaRPr lang="en-TH"/>
+          </a:p>
+        </p:txBody>
+      </p:sp>
+      <p:sp>
+        <p:nvSpPr>
+          <p:cNvPr id="3" name="Text Placeholder 2">
+            <a:extLst>
+              <a:ext uri="{FF2B5EF4-FFF2-40B4-BE49-F238E27FC236}">
+                <a16:creationId xmlns:a16="http://schemas.microsoft.com/office/drawing/2014/main" id="{E66D32E2-5A0B-D17F-B45F-B1A5019B5BF2}"/>
+              </a:ext>
+            </a:extLst>
+          </p:cNvPr>
+          <p:cNvSpPr>
+            <a:spLocks noGrp="1"/>
+          </p:cNvSpPr>
+          <p:nvPr>
+            <p:ph type="body" idx="1"/>
           </p:nvPr>
         </p:nvSpPr>
         <p:spPr>
           <a:xfrm>
-            <a:off x="7821429" y="6238816"/>
-            <a:ext cx="2753746" cy="323968"/>
+            <a:off x="838200" y="1825625"/>
+            <a:ext cx="10515600" cy="4351338"/>
           </a:xfrm>
           <a:prstGeom prst="rect">
             <a:avLst/>
           </a:prstGeom>
         </p:spPr>
         <p:txBody>
+          <a:bodyPr vert="horz" lIns="91440" tIns="45720" rIns="91440" bIns="45720" rtlCol="0">
+            <a:normAutofit/>
+          </a:bodyPr>
+          <a:lstStyle/>
+          <a:p>
+            <a:pPr lvl="0"/>
+            <a:r>
+              <a:rPr lang="en-US"/>
+              <a:t>Click to edit Master text styles</a:t>
+            </a:r>
+          </a:p>
+          <a:p>
+            <a:pPr lvl="1"/>
+            <a:r>
+              <a:rPr lang="en-US"/>
+              <a:t>Second level</a:t>
+            </a:r>
+          </a:p>
+          <a:p>
+            <a:pPr lvl="2"/>
+            <a:r>
+              <a:rPr lang="en-US"/>
+              <a:t>Third level</a:t>
+            </a:r>
+          </a:p>
+          <a:p>
+            <a:pPr lvl="3"/>
+            <a:r>
+              <a:rPr lang="en-US"/>
+              <a:t>Fourth level</a:t>
+            </a:r>
+          </a:p>
+          <a:p>
+            <a:pPr lvl="4"/>
+            <a:r>
+              <a:rPr lang="en-US"/>
+              <a:t>Fifth level</a:t>
+            </a:r>
+            <a:endParaRPr lang="en-TH"/>
+          </a:p>
+        </p:txBody>
+      </p:sp>
+      <p:sp>
+        <p:nvSpPr>
+          <p:cNvPr id="4" name="Date Placeholder 3">
+            <a:extLst>
+              <a:ext uri="{FF2B5EF4-FFF2-40B4-BE49-F238E27FC236}">
+                <a16:creationId xmlns:a16="http://schemas.microsoft.com/office/drawing/2014/main" id="{484C5B55-8768-8EF9-DB7A-814D70A14F39}"/>
+              </a:ext>
+            </a:extLst>
+          </p:cNvPr>
+          <p:cNvSpPr>
+            <a:spLocks noGrp="1"/>
+          </p:cNvSpPr>
+          <p:nvPr>
+            <p:ph type="dt" sz="half" idx="2"/>
+          </p:nvPr>
+        </p:nvSpPr>
+        <p:spPr>
+          <a:xfrm>
+            <a:off x="838200" y="6356350"/>
+            <a:ext cx="2743200" cy="365125"/>
+          </a:xfrm>
+          <a:prstGeom prst="rect">
+            <a:avLst/>
+          </a:prstGeom>
+        </p:spPr>
+        <p:txBody>
           <a:bodyPr vert="horz" lIns="91440" tIns="45720" rIns="91440" bIns="45720" rtlCol="0" anchor="ctr"/>
           <a:lstStyle>
-            <a:lvl1pPr algn="r">
-              <a:defRPr sz="1050">
+            <a:lvl1pPr algn="l">
+              <a:defRPr sz="1200">
                 <a:solidFill>
                   <a:schemeClr val="tx1">
-                    <a:alpha val="70000"/>
+                    <a:tint val="82000"/>
                   </a:schemeClr>
                 </a:solidFill>
               </a:defRPr>
@@ -2850,7 +2940,13 @@
       </p:sp>
       <p:sp>
         <p:nvSpPr>
-          <p:cNvPr id="5" name="Footer Placeholder 4"/>
+          <p:cNvPr id="5" name="Footer Placeholder 4">
+            <a:extLst>
+              <a:ext uri="{FF2B5EF4-FFF2-40B4-BE49-F238E27FC236}">
+                <a16:creationId xmlns:a16="http://schemas.microsoft.com/office/drawing/2014/main" id="{7C02E5CB-7561-5546-1202-3C5F44F13516}"/>
+              </a:ext>
+            </a:extLst>
+          </p:cNvPr>
           <p:cNvSpPr>
             <a:spLocks noGrp="1"/>
           </p:cNvSpPr>
@@ -2860,8 +2956,8 @@
         </p:nvSpPr>
         <p:spPr>
           <a:xfrm>
-            <a:off x="1600200" y="6236208"/>
-            <a:ext cx="5901189" cy="320040"/>
+            <a:off x="4038600" y="6356350"/>
+            <a:ext cx="4114800" cy="365125"/>
           </a:xfrm>
           <a:prstGeom prst="rect">
             <a:avLst/>
@@ -2870,11 +2966,11 @@
         <p:txBody>
           <a:bodyPr vert="horz" lIns="91440" tIns="45720" rIns="91440" bIns="45720" rtlCol="0" anchor="ctr"/>
           <a:lstStyle>
-            <a:lvl1pPr algn="l">
-              <a:defRPr sz="1050">
+            <a:lvl1pPr algn="ctr">
+              <a:defRPr sz="1200">
                 <a:solidFill>
                   <a:schemeClr val="tx1">
-                    <a:alpha val="70000"/>
+                    <a:tint val="82000"/>
                   </a:schemeClr>
                 </a:solidFill>
               </a:defRPr>
@@ -2887,7 +2983,13 @@
       </p:sp>
       <p:sp>
         <p:nvSpPr>
-          <p:cNvPr id="6" name="Slide Number Placeholder 5"/>
+          <p:cNvPr id="6" name="Slide Number Placeholder 5">
+            <a:extLst>
+              <a:ext uri="{FF2B5EF4-FFF2-40B4-BE49-F238E27FC236}">
+                <a16:creationId xmlns:a16="http://schemas.microsoft.com/office/drawing/2014/main" id="{4FD08DE0-69CB-424C-6BA8-4104BC06D4FB}"/>
+              </a:ext>
+            </a:extLst>
+          </p:cNvPr>
           <p:cNvSpPr>
             <a:spLocks noGrp="1"/>
           </p:cNvSpPr>
@@ -2897,27 +2999,22 @@
         </p:nvSpPr>
         <p:spPr>
           <a:xfrm>
-            <a:off x="10758922" y="6217920"/>
-            <a:ext cx="365760" cy="365760"/>
+            <a:off x="8610600" y="6356350"/>
+            <a:ext cx="2743200" cy="365125"/>
           </a:xfrm>
-          <a:prstGeom prst="ellipse">
+          <a:prstGeom prst="rect">
             <a:avLst/>
           </a:prstGeom>
-          <a:solidFill>
-            <a:srgbClr val="1D1D1D">
-              <a:alpha val="70000"/>
-            </a:srgbClr>
-          </a:solidFill>
         </p:spPr>
         <p:txBody>
-          <a:bodyPr vert="horz" lIns="18288" tIns="45720" rIns="18288" bIns="45720" rtlCol="0" anchor="ctr">
-            <a:noAutofit/>
-          </a:bodyPr>
+          <a:bodyPr vert="horz" lIns="91440" tIns="45720" rIns="91440" bIns="45720" rtlCol="0" anchor="ctr"/>
           <a:lstStyle>
-            <a:lvl1pPr algn="ctr">
-              <a:defRPr sz="1100" spc="0" baseline="0">
+            <a:lvl1pPr algn="r">
+              <a:defRPr sz="1200">
                 <a:solidFill>
-                  <a:srgbClr val="FFFFFF"/>
+                  <a:schemeClr val="tx1">
+                    <a:tint val="82000"/>
+                  </a:schemeClr>
                 </a:solidFill>
               </a:defRPr>
             </a:lvl1pPr>
@@ -2934,27 +3031,27 @@
     </p:spTree>
     <p:extLst>
       <p:ext uri="{BB962C8B-B14F-4D97-AF65-F5344CB8AC3E}">
-        <p14:creationId xmlns:p14="http://schemas.microsoft.com/office/powerpoint/2010/main" val="3375773296"/>
+        <p14:creationId xmlns:p14="http://schemas.microsoft.com/office/powerpoint/2010/main" val="680164083"/>
       </p:ext>
     </p:extLst>
   </p:cSld>
   <p:clrMap bg1="lt1" tx1="dk1" bg2="lt2" tx2="dk2" accent1="accent1" accent2="accent2" accent3="accent3" accent4="accent4" accent5="accent5" accent6="accent6" hlink="hlink" folHlink="folHlink"/>
   <p:sldLayoutIdLst>
-    <p:sldLayoutId id="2147483661" r:id="rId1"/>
-    <p:sldLayoutId id="2147483662" r:id="rId2"/>
-    <p:sldLayoutId id="2147483663" r:id="rId3"/>
-    <p:sldLayoutId id="2147483664" r:id="rId4"/>
-    <p:sldLayoutId id="2147483665" r:id="rId5"/>
-    <p:sldLayoutId id="2147483666" r:id="rId6"/>
-    <p:sldLayoutId id="2147483667" r:id="rId7"/>
-    <p:sldLayoutId id="2147483668" r:id="rId8"/>
-    <p:sldLayoutId id="2147483669" r:id="rId9"/>
-    <p:sldLayoutId id="2147483670" r:id="rId10"/>
-    <p:sldLayoutId id="2147483671" r:id="rId11"/>
+    <p:sldLayoutId id="2147483673" r:id="rId1"/>
+    <p:sldLayoutId id="2147483674" r:id="rId2"/>
+    <p:sldLayoutId id="2147483675" r:id="rId3"/>
+    <p:sldLayoutId id="2147483676" r:id="rId4"/>
+    <p:sldLayoutId id="2147483677" r:id="rId5"/>
+    <p:sldLayoutId id="2147483678" r:id="rId6"/>
+    <p:sldLayoutId id="2147483679" r:id="rId7"/>
+    <p:sldLayoutId id="2147483680" r:id="rId8"/>
+    <p:sldLayoutId id="2147483681" r:id="rId9"/>
+    <p:sldLayoutId id="2147483682" r:id="rId10"/>
+    <p:sldLayoutId id="2147483683" r:id="rId11"/>
   </p:sldLayoutIdLst>
   <p:txStyles>
     <p:titleStyle>
-      <a:lvl1pPr algn="ctr" defTabSz="914400" rtl="0" eaLnBrk="1" latinLnBrk="0" hangingPunct="1">
+      <a:lvl1pPr algn="l" defTabSz="914400" rtl="0" eaLnBrk="1" latinLnBrk="0" hangingPunct="1">
         <a:lnSpc>
           <a:spcPct val="90000"/>
         </a:lnSpc>
@@ -2962,9 +3059,9 @@
           <a:spcPct val="0"/>
         </a:spcBef>
         <a:buNone/>
-        <a:defRPr sz="2800" kern="1200" cap="all" spc="200" baseline="0">
+        <a:defRPr sz="4400" kern="1200">
           <a:solidFill>
-            <a:srgbClr val="262626"/>
+            <a:schemeClr val="tx1"/>
           </a:solidFill>
           <a:latin typeface="+mj-lt"/>
           <a:ea typeface="+mj-ea"/>
@@ -2975,137 +3072,104 @@
     <p:bodyStyle>
       <a:lvl1pPr marL="228600" indent="-228600" algn="l" defTabSz="914400" rtl="0" eaLnBrk="1" latinLnBrk="0" hangingPunct="1">
         <a:lnSpc>
-          <a:spcPct val="100000"/>
+          <a:spcPct val="90000"/>
         </a:lnSpc>
         <a:spcBef>
           <a:spcPts val="1000"/>
         </a:spcBef>
-        <a:buClr>
-          <a:schemeClr val="accent2"/>
-        </a:buClr>
         <a:buFont typeface="Arial" panose="020B0604020202020204" pitchFamily="34" charset="0"/>
         <a:buChar char="•"/>
-        <a:defRPr sz="1800" kern="1200">
+        <a:defRPr sz="2800" kern="1200">
           <a:solidFill>
-            <a:schemeClr val="tx1">
-              <a:lumMod val="85000"/>
-              <a:lumOff val="15000"/>
-            </a:schemeClr>
+            <a:schemeClr val="tx1"/>
           </a:solidFill>
           <a:latin typeface="+mn-lt"/>
           <a:ea typeface="+mn-ea"/>
           <a:cs typeface="+mn-cs"/>
         </a:defRPr>
       </a:lvl1pPr>
-      <a:lvl2pPr marL="457200" indent="-228600" algn="l" defTabSz="914400" rtl="0" eaLnBrk="1" latinLnBrk="0" hangingPunct="1">
+      <a:lvl2pPr marL="685800" indent="-228600" algn="l" defTabSz="914400" rtl="0" eaLnBrk="1" latinLnBrk="0" hangingPunct="1">
         <a:lnSpc>
-          <a:spcPct val="100000"/>
+          <a:spcPct val="90000"/>
         </a:lnSpc>
         <a:spcBef>
-          <a:spcPts val="1000"/>
+          <a:spcPts val="500"/>
         </a:spcBef>
-        <a:buClr>
-          <a:schemeClr val="accent2"/>
-        </a:buClr>
         <a:buFont typeface="Arial" panose="020B0604020202020204" pitchFamily="34" charset="0"/>
         <a:buChar char="•"/>
-        <a:defRPr sz="1600" kern="1200">
+        <a:defRPr sz="2400" kern="1200">
           <a:solidFill>
-            <a:schemeClr val="tx1">
-              <a:lumMod val="85000"/>
-              <a:lumOff val="15000"/>
-            </a:schemeClr>
+            <a:schemeClr val="tx1"/>
           </a:solidFill>
           <a:latin typeface="+mn-lt"/>
           <a:ea typeface="+mn-ea"/>
           <a:cs typeface="+mn-cs"/>
         </a:defRPr>
       </a:lvl2pPr>
-      <a:lvl3pPr marL="685800" indent="-228600" algn="l" defTabSz="914400" rtl="0" eaLnBrk="1" latinLnBrk="0" hangingPunct="1">
+      <a:lvl3pPr marL="1143000" indent="-228600" algn="l" defTabSz="914400" rtl="0" eaLnBrk="1" latinLnBrk="0" hangingPunct="1">
         <a:lnSpc>
-          <a:spcPct val="100000"/>
+          <a:spcPct val="90000"/>
         </a:lnSpc>
         <a:spcBef>
-          <a:spcPts val="1000"/>
+          <a:spcPts val="500"/>
         </a:spcBef>
-        <a:buClr>
-          <a:schemeClr val="accent2"/>
-        </a:buClr>
         <a:buFont typeface="Arial" panose="020B0604020202020204" pitchFamily="34" charset="0"/>
         <a:buChar char="•"/>
-        <a:defRPr sz="1600" kern="1200">
+        <a:defRPr sz="2000" kern="1200">
           <a:solidFill>
-            <a:schemeClr val="tx1">
-              <a:lumMod val="85000"/>
-              <a:lumOff val="15000"/>
-            </a:schemeClr>
+            <a:schemeClr val="tx1"/>
           </a:solidFill>
           <a:latin typeface="+mn-lt"/>
           <a:ea typeface="+mn-ea"/>
           <a:cs typeface="+mn-cs"/>
         </a:defRPr>
       </a:lvl3pPr>
-      <a:lvl4pPr marL="914400" indent="-228600" algn="l" defTabSz="914400" rtl="0" eaLnBrk="1" latinLnBrk="0" hangingPunct="1">
+      <a:lvl4pPr marL="1600200" indent="-228600" algn="l" defTabSz="914400" rtl="0" eaLnBrk="1" latinLnBrk="0" hangingPunct="1">
         <a:lnSpc>
-          <a:spcPct val="100000"/>
+          <a:spcPct val="90000"/>
         </a:lnSpc>
         <a:spcBef>
-          <a:spcPts val="1000"/>
+          <a:spcPts val="500"/>
         </a:spcBef>
-        <a:buClr>
-          <a:schemeClr val="accent2"/>
-        </a:buClr>
         <a:buFont typeface="Arial" panose="020B0604020202020204" pitchFamily="34" charset="0"/>
         <a:buChar char="•"/>
-        <a:defRPr sz="1600" kern="1200">
+        <a:defRPr sz="1800" kern="1200">
           <a:solidFill>
-            <a:schemeClr val="tx1">
-              <a:lumMod val="85000"/>
-              <a:lumOff val="15000"/>
-            </a:schemeClr>
+            <a:schemeClr val="tx1"/>
           </a:solidFill>
           <a:latin typeface="+mn-lt"/>
           <a:ea typeface="+mn-ea"/>
           <a:cs typeface="+mn-cs"/>
         </a:defRPr>
       </a:lvl4pPr>
-      <a:lvl5pPr marL="1143000" indent="-228600" algn="l" defTabSz="914400" rtl="0" eaLnBrk="1" latinLnBrk="0" hangingPunct="1">
+      <a:lvl5pPr marL="2057400" indent="-228600" algn="l" defTabSz="914400" rtl="0" eaLnBrk="1" latinLnBrk="0" hangingPunct="1">
         <a:lnSpc>
-          <a:spcPct val="100000"/>
+          <a:spcPct val="90000"/>
         </a:lnSpc>
         <a:spcBef>
-          <a:spcPts val="1000"/>
+          <a:spcPts val="500"/>
         </a:spcBef>
-        <a:buClr>
-          <a:schemeClr val="accent2"/>
-        </a:buClr>
         <a:buFont typeface="Arial" panose="020B0604020202020204" pitchFamily="34" charset="0"/>
         <a:buChar char="•"/>
-        <a:defRPr sz="1600" kern="1200">
+        <a:defRPr sz="1800" kern="1200">
           <a:solidFill>
-            <a:schemeClr val="tx1">
-              <a:lumMod val="85000"/>
-              <a:lumOff val="15000"/>
-            </a:schemeClr>
+            <a:schemeClr val="tx1"/>
           </a:solidFill>
           <a:latin typeface="+mn-lt"/>
           <a:ea typeface="+mn-ea"/>
           <a:cs typeface="+mn-cs"/>
         </a:defRPr>
       </a:lvl5pPr>
-      <a:lvl6pPr marL="1312863" indent="-228600" algn="l" defTabSz="914400" rtl="0" eaLnBrk="1" latinLnBrk="0" hangingPunct="1">
+      <a:lvl6pPr marL="2514600" indent="-228600" algn="l" defTabSz="914400" rtl="0" eaLnBrk="1" latinLnBrk="0" hangingPunct="1">
         <a:lnSpc>
-          <a:spcPct val="100000"/>
+          <a:spcPct val="90000"/>
         </a:lnSpc>
         <a:spcBef>
-          <a:spcPts val="1000"/>
+          <a:spcPts val="500"/>
         </a:spcBef>
-        <a:buClr>
-          <a:schemeClr val="accent2"/>
-        </a:buClr>
         <a:buFont typeface="Arial" panose="020B0604020202020204" pitchFamily="34" charset="0"/>
         <a:buChar char="•"/>
-        <a:defRPr sz="1600" kern="1200">
+        <a:defRPr sz="1800" kern="1200">
           <a:solidFill>
             <a:schemeClr val="tx1"/>
           </a:solidFill>
@@ -3114,19 +3178,16 @@
           <a:cs typeface="+mn-cs"/>
         </a:defRPr>
       </a:lvl6pPr>
-      <a:lvl7pPr marL="1484313" indent="-228600" algn="l" defTabSz="914400" rtl="0" eaLnBrk="1" latinLnBrk="0" hangingPunct="1">
+      <a:lvl7pPr marL="2971800" indent="-228600" algn="l" defTabSz="914400" rtl="0" eaLnBrk="1" latinLnBrk="0" hangingPunct="1">
         <a:lnSpc>
-          <a:spcPct val="100000"/>
+          <a:spcPct val="90000"/>
         </a:lnSpc>
         <a:spcBef>
-          <a:spcPts val="1000"/>
+          <a:spcPts val="500"/>
         </a:spcBef>
-        <a:buClr>
-          <a:schemeClr val="accent2"/>
-        </a:buClr>
         <a:buFont typeface="Arial" panose="020B0604020202020204" pitchFamily="34" charset="0"/>
         <a:buChar char="•"/>
-        <a:defRPr sz="1600" kern="1200">
+        <a:defRPr sz="1800" kern="1200">
           <a:solidFill>
             <a:schemeClr val="tx1"/>
           </a:solidFill>
@@ -3135,19 +3196,16 @@
           <a:cs typeface="+mn-cs"/>
         </a:defRPr>
       </a:lvl7pPr>
-      <a:lvl8pPr marL="1657350" indent="-228600" algn="l" defTabSz="914400" rtl="0" eaLnBrk="1" latinLnBrk="0" hangingPunct="1">
+      <a:lvl8pPr marL="3429000" indent="-228600" algn="l" defTabSz="914400" rtl="0" eaLnBrk="1" latinLnBrk="0" hangingPunct="1">
         <a:lnSpc>
-          <a:spcPct val="100000"/>
+          <a:spcPct val="90000"/>
         </a:lnSpc>
         <a:spcBef>
-          <a:spcPts val="1000"/>
+          <a:spcPts val="500"/>
         </a:spcBef>
-        <a:buClr>
-          <a:schemeClr val="accent2"/>
-        </a:buClr>
         <a:buFont typeface="Arial" panose="020B0604020202020204" pitchFamily="34" charset="0"/>
         <a:buChar char="•"/>
-        <a:defRPr sz="1600" kern="1200" baseline="0">
+        <a:defRPr sz="1800" kern="1200">
           <a:solidFill>
             <a:schemeClr val="tx1"/>
           </a:solidFill>
@@ -3156,19 +3214,16 @@
           <a:cs typeface="+mn-cs"/>
         </a:defRPr>
       </a:lvl8pPr>
-      <a:lvl9pPr marL="1882775" indent="-228600" algn="l" defTabSz="914400" rtl="0" eaLnBrk="1" latinLnBrk="0" hangingPunct="1">
+      <a:lvl9pPr marL="3886200" indent="-228600" algn="l" defTabSz="914400" rtl="0" eaLnBrk="1" latinLnBrk="0" hangingPunct="1">
         <a:lnSpc>
-          <a:spcPct val="100000"/>
+          <a:spcPct val="90000"/>
         </a:lnSpc>
         <a:spcBef>
-          <a:spcPts val="1000"/>
+          <a:spcPts val="500"/>
         </a:spcBef>
-        <a:buClr>
-          <a:schemeClr val="accent2"/>
-        </a:buClr>
         <a:buFont typeface="Arial" panose="020B0604020202020204" pitchFamily="34" charset="0"/>
         <a:buChar char="•"/>
-        <a:defRPr sz="1600" kern="1200" baseline="0">
+        <a:defRPr sz="1800" kern="1200">
           <a:solidFill>
             <a:schemeClr val="tx1"/>
           </a:solidFill>
@@ -3180,7 +3235,7 @@
     </p:bodyStyle>
     <p:otherStyle>
       <a:defPPr>
-        <a:defRPr lang="en-US"/>
+        <a:defRPr lang="en-TH"/>
       </a:defPPr>
       <a:lvl1pPr marL="0" algn="l" defTabSz="914400" rtl="0" eaLnBrk="1" latinLnBrk="0" hangingPunct="1">
         <a:defRPr sz="1800" kern="1200">
@@ -3356,6 +3411,321 @@
       </p:grpSpPr>
       <p:grpSp>
         <p:nvGrpSpPr>
+          <p:cNvPr id="4" name="Group 3">
+            <a:extLst>
+              <a:ext uri="{FF2B5EF4-FFF2-40B4-BE49-F238E27FC236}">
+                <a16:creationId xmlns:a16="http://schemas.microsoft.com/office/drawing/2014/main" id="{6D55E6BF-FA97-76E6-6A20-3BED7B3C384D}"/>
+              </a:ext>
+            </a:extLst>
+          </p:cNvPr>
+          <p:cNvGrpSpPr/>
+          <p:nvPr/>
+        </p:nvGrpSpPr>
+        <p:grpSpPr>
+          <a:xfrm>
+            <a:off x="42231" y="1475035"/>
+            <a:ext cx="12107537" cy="3907930"/>
+            <a:chOff x="42231" y="1475035"/>
+            <a:chExt cx="12107537" cy="3907930"/>
+          </a:xfrm>
+        </p:grpSpPr>
+        <p:sp>
+          <p:nvSpPr>
+            <p:cNvPr id="5" name="Rounded Rectangle 4">
+              <a:extLst>
+                <a:ext uri="{FF2B5EF4-FFF2-40B4-BE49-F238E27FC236}">
+                  <a16:creationId xmlns:a16="http://schemas.microsoft.com/office/drawing/2014/main" id="{530B0152-5B43-4BCF-8C1F-3CE8273E1946}"/>
+                </a:ext>
+              </a:extLst>
+            </p:cNvPr>
+            <p:cNvSpPr/>
+            <p:nvPr/>
+          </p:nvSpPr>
+          <p:spPr>
+            <a:xfrm>
+              <a:off x="42231" y="1475035"/>
+              <a:ext cx="12107537" cy="3907930"/>
+            </a:xfrm>
+            <a:prstGeom prst="roundRect">
+              <a:avLst>
+                <a:gd name="adj" fmla="val 50000"/>
+              </a:avLst>
+            </a:prstGeom>
+            <a:solidFill>
+              <a:schemeClr val="bg1"/>
+            </a:solidFill>
+            <a:ln w="76200">
+              <a:solidFill>
+                <a:srgbClr val="FF0000"/>
+              </a:solidFill>
+            </a:ln>
+          </p:spPr>
+          <p:style>
+            <a:lnRef idx="2">
+              <a:schemeClr val="accent1">
+                <a:shade val="15000"/>
+              </a:schemeClr>
+            </a:lnRef>
+            <a:fillRef idx="1">
+              <a:schemeClr val="accent1"/>
+            </a:fillRef>
+            <a:effectRef idx="0">
+              <a:schemeClr val="accent1"/>
+            </a:effectRef>
+            <a:fontRef idx="minor">
+              <a:schemeClr val="lt1"/>
+            </a:fontRef>
+          </p:style>
+          <p:txBody>
+            <a:bodyPr rtlCol="0" anchor="ctr"/>
+            <a:lstStyle/>
+            <a:p>
+              <a:pPr algn="ctr"/>
+              <a:endParaRPr lang="en-TH"/>
+            </a:p>
+          </p:txBody>
+        </p:sp>
+        <p:grpSp>
+          <p:nvGrpSpPr>
+            <p:cNvPr id="6" name="Group 5">
+              <a:extLst>
+                <a:ext uri="{FF2B5EF4-FFF2-40B4-BE49-F238E27FC236}">
+                  <a16:creationId xmlns:a16="http://schemas.microsoft.com/office/drawing/2014/main" id="{3C9B9721-0FB0-12B5-B49E-8CB358B3EB42}"/>
+                </a:ext>
+              </a:extLst>
+            </p:cNvPr>
+            <p:cNvGrpSpPr/>
+            <p:nvPr/>
+          </p:nvGrpSpPr>
+          <p:grpSpPr>
+            <a:xfrm>
+              <a:off x="889317" y="2260833"/>
+              <a:ext cx="10413364" cy="2444707"/>
+              <a:chOff x="427364" y="2180956"/>
+              <a:chExt cx="11490498" cy="2697582"/>
+            </a:xfrm>
+          </p:grpSpPr>
+          <p:grpSp>
+            <p:nvGrpSpPr>
+              <p:cNvPr id="7" name="Group 6">
+                <a:extLst>
+                  <a:ext uri="{FF2B5EF4-FFF2-40B4-BE49-F238E27FC236}">
+                    <a16:creationId xmlns:a16="http://schemas.microsoft.com/office/drawing/2014/main" id="{3F2E97D1-433E-F169-6040-8730FA759B78}"/>
+                  </a:ext>
+                </a:extLst>
+              </p:cNvPr>
+              <p:cNvGrpSpPr/>
+              <p:nvPr/>
+            </p:nvGrpSpPr>
+            <p:grpSpPr>
+              <a:xfrm>
+                <a:off x="4021040" y="3641759"/>
+                <a:ext cx="4149917" cy="1236779"/>
+                <a:chOff x="3966096" y="3880266"/>
+                <a:chExt cx="4675534" cy="1393426"/>
+              </a:xfrm>
+            </p:grpSpPr>
+            <p:sp>
+              <p:nvSpPr>
+                <p:cNvPr id="9" name="Freeform 8">
+                  <a:extLst>
+                    <a:ext uri="{FF2B5EF4-FFF2-40B4-BE49-F238E27FC236}">
+                      <a16:creationId xmlns:a16="http://schemas.microsoft.com/office/drawing/2014/main" id="{2D98D731-CD20-8112-1BB8-BB12F997664B}"/>
+                    </a:ext>
+                  </a:extLst>
+                </p:cNvPr>
+                <p:cNvSpPr/>
+                <p:nvPr/>
+              </p:nvSpPr>
+              <p:spPr>
+                <a:xfrm>
+                  <a:off x="3966096" y="4146821"/>
+                  <a:ext cx="2752093" cy="763846"/>
+                </a:xfrm>
+                <a:custGeom>
+                  <a:avLst/>
+                  <a:gdLst/>
+                  <a:ahLst/>
+                  <a:cxnLst/>
+                  <a:rect l="l" t="t" r="r" b="b"/>
+                  <a:pathLst>
+                    <a:path w="5856576" h="1625499">
+                      <a:moveTo>
+                        <a:pt x="0" y="0"/>
+                      </a:moveTo>
+                      <a:lnTo>
+                        <a:pt x="5856576" y="0"/>
+                      </a:lnTo>
+                      <a:lnTo>
+                        <a:pt x="5856576" y="1625498"/>
+                      </a:lnTo>
+                      <a:lnTo>
+                        <a:pt x="0" y="1625498"/>
+                      </a:lnTo>
+                      <a:lnTo>
+                        <a:pt x="0" y="0"/>
+                      </a:lnTo>
+                      <a:close/>
+                    </a:path>
+                  </a:pathLst>
+                </a:custGeom>
+                <a:blipFill>
+                  <a:blip r:embed="rId2"/>
+                  <a:stretch>
+                    <a:fillRect t="-77014" b="-77743"/>
+                  </a:stretch>
+                </a:blipFill>
+              </p:spPr>
+              <p:txBody>
+                <a:bodyPr/>
+                <a:lstStyle/>
+                <a:p>
+                  <a:endParaRPr lang="en-TH"/>
+                </a:p>
+              </p:txBody>
+            </p:sp>
+            <p:sp>
+              <p:nvSpPr>
+                <p:cNvPr id="10" name="TextBox 9">
+                  <a:extLst>
+                    <a:ext uri="{FF2B5EF4-FFF2-40B4-BE49-F238E27FC236}">
+                      <a16:creationId xmlns:a16="http://schemas.microsoft.com/office/drawing/2014/main" id="{00497D4D-CA08-2421-9C85-2EFDE6052831}"/>
+                    </a:ext>
+                  </a:extLst>
+                </p:cNvPr>
+                <p:cNvSpPr txBox="1"/>
+                <p:nvPr/>
+              </p:nvSpPr>
+              <p:spPr>
+                <a:xfrm>
+                  <a:off x="6638233" y="3896236"/>
+                  <a:ext cx="825438" cy="1377456"/>
+                </a:xfrm>
+                <a:prstGeom prst="rect">
+                  <a:avLst/>
+                </a:prstGeom>
+                <a:noFill/>
+              </p:spPr>
+              <p:txBody>
+                <a:bodyPr wrap="none" rtlCol="0" anchor="ctr">
+                  <a:spAutoFit/>
+                </a:bodyPr>
+                <a:lstStyle/>
+                <a:p>
+                  <a:pPr algn="ctr"/>
+                  <a:r>
+                    <a:rPr lang="en-TH" sz="6600" dirty="0">
+                      <a:latin typeface="SUKHUMVITSET-TEXT" panose="02000506000000020004" pitchFamily="2" charset="-34"/>
+                      <a:cs typeface="SUKHUMVITSET-TEXT" panose="02000506000000020004" pitchFamily="2" charset="-34"/>
+                    </a:rPr>
+                    <a:t>×</a:t>
+                  </a:r>
+                </a:p>
+              </p:txBody>
+            </p:sp>
+            <p:pic>
+              <p:nvPicPr>
+                <p:cNvPr id="11" name="Picture 10" descr="A blue background with white text&#10;&#10;Description automatically generated">
+                  <a:extLst>
+                    <a:ext uri="{FF2B5EF4-FFF2-40B4-BE49-F238E27FC236}">
+                      <a16:creationId xmlns:a16="http://schemas.microsoft.com/office/drawing/2014/main" id="{301287F2-2EF4-CDE2-B18D-CD8A313BC521}"/>
+                    </a:ext>
+                  </a:extLst>
+                </p:cNvPr>
+                <p:cNvPicPr>
+                  <a:picLocks noChangeAspect="1"/>
+                </p:cNvPicPr>
+                <p:nvPr/>
+              </p:nvPicPr>
+              <p:blipFill rotWithShape="1">
+                <a:blip r:embed="rId3"/>
+                <a:srcRect l="21864" r="21864"/>
+                <a:stretch/>
+              </p:blipFill>
+              <p:spPr>
+                <a:xfrm>
+                  <a:off x="7382934" y="3880266"/>
+                  <a:ext cx="1258696" cy="1258696"/>
+                </a:xfrm>
+                <a:prstGeom prst="ellipse">
+                  <a:avLst/>
+                </a:prstGeom>
+              </p:spPr>
+            </p:pic>
+          </p:grpSp>
+          <p:sp>
+            <p:nvSpPr>
+              <p:cNvPr id="8" name="TextBox 7">
+                <a:extLst>
+                  <a:ext uri="{FF2B5EF4-FFF2-40B4-BE49-F238E27FC236}">
+                    <a16:creationId xmlns:a16="http://schemas.microsoft.com/office/drawing/2014/main" id="{50911705-F27A-7C54-59F5-A116DF2AAB1A}"/>
+                  </a:ext>
+                </a:extLst>
+              </p:cNvPr>
+              <p:cNvSpPr txBox="1"/>
+              <p:nvPr/>
+            </p:nvSpPr>
+            <p:spPr>
+              <a:xfrm>
+                <a:off x="427364" y="2180956"/>
+                <a:ext cx="11490498" cy="1596178"/>
+              </a:xfrm>
+              <a:prstGeom prst="rect">
+                <a:avLst/>
+              </a:prstGeom>
+              <a:noFill/>
+            </p:spPr>
+            <p:txBody>
+              <a:bodyPr wrap="none" rtlCol="0">
+                <a:spAutoFit/>
+              </a:bodyPr>
+              <a:lstStyle/>
+              <a:p>
+                <a:pPr algn="ctr"/>
+                <a:r>
+                  <a:rPr lang="en-TH" sz="8800" b="1" dirty="0">
+                    <a:latin typeface="SUKHUMVITSET-TEXT" panose="02000506000000020004" pitchFamily="2" charset="-34"/>
+                    <a:cs typeface="SUKHUMVITSET-TEXT" panose="02000506000000020004" pitchFamily="2" charset="-34"/>
+                  </a:rPr>
+                  <a:t>HR Analytics Project</a:t>
+                </a:r>
+              </a:p>
+            </p:txBody>
+          </p:sp>
+        </p:grpSp>
+      </p:grpSp>
+    </p:spTree>
+    <p:extLst>
+      <p:ext uri="{BB962C8B-B14F-4D97-AF65-F5344CB8AC3E}">
+        <p14:creationId xmlns:p14="http://schemas.microsoft.com/office/powerpoint/2010/main" val="561987999"/>
+      </p:ext>
+    </p:extLst>
+  </p:cSld>
+  <p:clrMapOvr>
+    <a:masterClrMapping/>
+  </p:clrMapOvr>
+</p:sld>
+</file>
+
+<file path=ppt/slides/slide3.xml><?xml version="1.0" encoding="utf-8"?>
+<p:sld xmlns:a="http://schemas.openxmlformats.org/drawingml/2006/main" xmlns:r="http://schemas.openxmlformats.org/officeDocument/2006/relationships" xmlns:p="http://schemas.openxmlformats.org/presentationml/2006/main">
+  <p:cSld>
+    <p:spTree>
+      <p:nvGrpSpPr>
+        <p:cNvPr id="1" name=""/>
+        <p:cNvGrpSpPr/>
+        <p:nvPr/>
+      </p:nvGrpSpPr>
+      <p:grpSpPr>
+        <a:xfrm>
+          <a:off x="0" y="0"/>
+          <a:ext cx="0" cy="0"/>
+          <a:chOff x="0" y="0"/>
+          <a:chExt cx="0" cy="0"/>
+        </a:xfrm>
+      </p:grpSpPr>
+      <p:grpSp>
+        <p:nvGrpSpPr>
           <p:cNvPr id="17" name="Group 16">
             <a:extLst>
               <a:ext uri="{FF2B5EF4-FFF2-40B4-BE49-F238E27FC236}">
@@ -3475,58 +3845,108 @@
 </file>
 
 <file path=ppt/theme/theme1.xml><?xml version="1.0" encoding="utf-8"?>
-<a:theme xmlns:a="http://schemas.openxmlformats.org/drawingml/2006/main" name="Parcel">
+<a:theme xmlns:a="http://schemas.openxmlformats.org/drawingml/2006/main" name="Office Theme">
   <a:themeElements>
-    <a:clrScheme name="Parcel">
+    <a:clrScheme name="Office">
       <a:dk1>
-        <a:srgbClr val="000000"/>
+        <a:sysClr val="windowText" lastClr="000000"/>
       </a:dk1>
       <a:lt1>
-        <a:srgbClr val="FFFFFF"/>
+        <a:sysClr val="window" lastClr="FFFFFF"/>
       </a:lt1>
       <a:dk2>
-        <a:srgbClr val="4A5356"/>
+        <a:srgbClr val="0E2841"/>
       </a:dk2>
       <a:lt2>
-        <a:srgbClr val="E8E3CE"/>
+        <a:srgbClr val="E8E8E8"/>
       </a:lt2>
       <a:accent1>
-        <a:srgbClr val="F6A21D"/>
+        <a:srgbClr val="156082"/>
       </a:accent1>
       <a:accent2>
-        <a:srgbClr val="9BAFB5"/>
+        <a:srgbClr val="E97132"/>
       </a:accent2>
       <a:accent3>
-        <a:srgbClr val="C96731"/>
+        <a:srgbClr val="196B24"/>
       </a:accent3>
       <a:accent4>
-        <a:srgbClr val="9CA383"/>
+        <a:srgbClr val="0F9ED5"/>
       </a:accent4>
       <a:accent5>
-        <a:srgbClr val="87795D"/>
+        <a:srgbClr val="A02B93"/>
       </a:accent5>
       <a:accent6>
-        <a:srgbClr val="A0988C"/>
+        <a:srgbClr val="4EA72E"/>
       </a:accent6>
       <a:hlink>
-        <a:srgbClr val="00B0F0"/>
+        <a:srgbClr val="467886"/>
       </a:hlink>
       <a:folHlink>
-        <a:srgbClr val="738F97"/>
+        <a:srgbClr val="96607D"/>
       </a:folHlink>
     </a:clrScheme>
-    <a:fontScheme name="Parcel">
+    <a:fontScheme name="Office">
       <a:majorFont>
-        <a:latin typeface="Gill Sans MT" panose="020B0502020104020203"/>
+        <a:latin typeface="Aptos Display" panose="02110004020202020204"/>
         <a:ea typeface=""/>
         <a:cs typeface=""/>
-        <a:font script="Grek" typeface="Corbel"/>
-        <a:font script="Cyrl" typeface="Corbel"/>
-        <a:font script="Jpan" typeface="HGｺﾞｼｯｸE"/>
-        <a:font script="Hang" typeface="휴먼매직체"/>
-        <a:font script="Hans" typeface="华文中宋"/>
-        <a:font script="Hant" typeface="微軟正黑體"/>
-        <a:font script="Arab" typeface="Majalla UI"/>
+        <a:font script="Jpan" typeface="游ゴシック Light"/>
+        <a:font script="Hang" typeface="맑은 고딕"/>
+        <a:font script="Hans" typeface="等线 Light"/>
+        <a:font script="Hant" typeface="新細明體"/>
+        <a:font script="Arab" typeface="Times New Roman"/>
+        <a:font script="Hebr" typeface="Times New Roman"/>
+        <a:font script="Thai" typeface="Angsana New"/>
+        <a:font script="Ethi" typeface="Nyala"/>
+        <a:font script="Beng" typeface="Vrinda"/>
+        <a:font script="Gujr" typeface="Shruti"/>
+        <a:font script="Khmr" typeface="MoolBoran"/>
+        <a:font script="Knda" typeface="Tunga"/>
+        <a:font script="Guru" typeface="Raavi"/>
+        <a:font script="Cans" typeface="Euphemia"/>
+        <a:font script="Cher" typeface="Plantagenet Cherokee"/>
+        <a:font script="Yiii" typeface="Microsoft Yi Baiti"/>
+        <a:font script="Tibt" typeface="Microsoft Himalaya"/>
+        <a:font script="Thaa" typeface="MV Boli"/>
+        <a:font script="Deva" typeface="Mangal"/>
+        <a:font script="Telu" typeface="Gautami"/>
+        <a:font script="Taml" typeface="Latha"/>
+        <a:font script="Syrc" typeface="Estrangelo Edessa"/>
+        <a:font script="Orya" typeface="Kalinga"/>
+        <a:font script="Mlym" typeface="Kartika"/>
+        <a:font script="Laoo" typeface="DokChampa"/>
+        <a:font script="Sinh" typeface="Iskoola Pota"/>
+        <a:font script="Mong" typeface="Mongolian Baiti"/>
+        <a:font script="Viet" typeface="Times New Roman"/>
+        <a:font script="Uigh" typeface="Microsoft Uighur"/>
+        <a:font script="Geor" typeface="Sylfaen"/>
+        <a:font script="Armn" typeface="Arial"/>
+        <a:font script="Bugi" typeface="Leelawadee UI"/>
+        <a:font script="Bopo" typeface="Microsoft JhengHei"/>
+        <a:font script="Java" typeface="Javanese Text"/>
+        <a:font script="Lisu" typeface="Segoe UI"/>
+        <a:font script="Mymr" typeface="Myanmar Text"/>
+        <a:font script="Nkoo" typeface="Ebrima"/>
+        <a:font script="Olck" typeface="Nirmala UI"/>
+        <a:font script="Osma" typeface="Ebrima"/>
+        <a:font script="Phag" typeface="Phagspa"/>
+        <a:font script="Syrn" typeface="Estrangelo Edessa"/>
+        <a:font script="Syrj" typeface="Estrangelo Edessa"/>
+        <a:font script="Syre" typeface="Estrangelo Edessa"/>
+        <a:font script="Sora" typeface="Nirmala UI"/>
+        <a:font script="Tale" typeface="Microsoft Tai Le"/>
+        <a:font script="Talu" typeface="Microsoft New Tai Lue"/>
+        <a:font script="Tfng" typeface="Ebrima"/>
+      </a:majorFont>
+      <a:minorFont>
+        <a:latin typeface="Aptos" panose="02110004020202020204"/>
+        <a:ea typeface=""/>
+        <a:cs typeface=""/>
+        <a:font script="Jpan" typeface="游ゴシック"/>
+        <a:font script="Hang" typeface="맑은 고딕"/>
+        <a:font script="Hans" typeface="等线"/>
+        <a:font script="Hant" typeface="新細明體"/>
+        <a:font script="Arab" typeface="Arial"/>
         <a:font script="Hebr" typeface="Arial"/>
         <a:font script="Thai" typeface="Cordia New"/>
         <a:font script="Ethi" typeface="Nyala"/>
@@ -3549,49 +3969,29 @@
         <a:font script="Laoo" typeface="DokChampa"/>
         <a:font script="Sinh" typeface="Iskoola Pota"/>
         <a:font script="Mong" typeface="Mongolian Baiti"/>
-        <a:font script="Viet" typeface="Tahoma"/>
+        <a:font script="Viet" typeface="Arial"/>
         <a:font script="Uigh" typeface="Microsoft Uighur"/>
         <a:font script="Geor" typeface="Sylfaen"/>
-      </a:majorFont>
-      <a:minorFont>
-        <a:latin typeface="Gill Sans MT" panose="020B0502020104020203"/>
-        <a:ea typeface=""/>
-        <a:cs typeface=""/>
-        <a:font script="Grek" typeface="Corbel"/>
-        <a:font script="Cyrl" typeface="Corbel"/>
-        <a:font script="Jpan" typeface="HGｺﾞｼｯｸE"/>
-        <a:font script="Hang" typeface="휴먼매직체"/>
-        <a:font script="Hans" typeface="华文中宋"/>
-        <a:font script="Hant" typeface="微軟正黑體"/>
-        <a:font script="Arab" typeface="Majalla UI"/>
-        <a:font script="Hebr" typeface="Arial"/>
-        <a:font script="Thai" typeface="Cordia New"/>
-        <a:font script="Ethi" typeface="Nyala"/>
-        <a:font script="Beng" typeface="Vrinda"/>
-        <a:font script="Gujr" typeface="Shruti"/>
-        <a:font script="Khmr" typeface="DaunPenh"/>
-        <a:font script="Knda" typeface="Tunga"/>
-        <a:font script="Guru" typeface="Raavi"/>
-        <a:font script="Cans" typeface="Euphemia"/>
-        <a:font script="Cher" typeface="Plantagenet Cherokee"/>
-        <a:font script="Yiii" typeface="Microsoft Yi Baiti"/>
-        <a:font script="Tibt" typeface="Microsoft Himalaya"/>
-        <a:font script="Thaa" typeface="MV Boli"/>
-        <a:font script="Deva" typeface="Mangal"/>
-        <a:font script="Telu" typeface="Gautami"/>
-        <a:font script="Taml" typeface="Latha"/>
-        <a:font script="Syrc" typeface="Estrangelo Edessa"/>
-        <a:font script="Orya" typeface="Kalinga"/>
-        <a:font script="Mlym" typeface="Kartika"/>
-        <a:font script="Laoo" typeface="DokChampa"/>
-        <a:font script="Sinh" typeface="Iskoola Pota"/>
-        <a:font script="Mong" typeface="Mongolian Baiti"/>
-        <a:font script="Viet" typeface="Tahoma"/>
-        <a:font script="Uigh" typeface="Microsoft Uighur"/>
-        <a:font script="Geor" typeface="Sylfaen"/>
+        <a:font script="Armn" typeface="Arial"/>
+        <a:font script="Bugi" typeface="Leelawadee UI"/>
+        <a:font script="Bopo" typeface="Microsoft JhengHei"/>
+        <a:font script="Java" typeface="Javanese Text"/>
+        <a:font script="Lisu" typeface="Segoe UI"/>
+        <a:font script="Mymr" typeface="Myanmar Text"/>
+        <a:font script="Nkoo" typeface="Ebrima"/>
+        <a:font script="Olck" typeface="Nirmala UI"/>
+        <a:font script="Osma" typeface="Ebrima"/>
+        <a:font script="Phag" typeface="Phagspa"/>
+        <a:font script="Syrn" typeface="Estrangelo Edessa"/>
+        <a:font script="Syrj" typeface="Estrangelo Edessa"/>
+        <a:font script="Syre" typeface="Estrangelo Edessa"/>
+        <a:font script="Sora" typeface="Nirmala UI"/>
+        <a:font script="Tale" typeface="Microsoft Tai Le"/>
+        <a:font script="Talu" typeface="Microsoft New Tai Lue"/>
+        <a:font script="Tfng" typeface="Ebrima"/>
       </a:minorFont>
     </a:fontScheme>
-    <a:fmtScheme name="Parcel">
+    <a:fmtScheme name="Office">
       <a:fillStyleLst>
         <a:solidFill>
           <a:schemeClr val="phClr"/>
@@ -3600,16 +4000,23 @@
           <a:gsLst>
             <a:gs pos="0">
               <a:schemeClr val="phClr">
-                <a:tint val="80000"/>
-                <a:satMod val="107000"/>
-                <a:lumMod val="103000"/>
+                <a:lumMod val="110000"/>
+                <a:satMod val="105000"/>
+                <a:tint val="67000"/>
+              </a:schemeClr>
+            </a:gs>
+            <a:gs pos="50000">
+              <a:schemeClr val="phClr">
+                <a:lumMod val="105000"/>
+                <a:satMod val="103000"/>
+                <a:tint val="73000"/>
               </a:schemeClr>
             </a:gs>
             <a:gs pos="100000">
               <a:schemeClr val="phClr">
-                <a:tint val="82000"/>
+                <a:lumMod val="105000"/>
                 <a:satMod val="109000"/>
-                <a:lumMod val="103000"/>
+                <a:tint val="81000"/>
               </a:schemeClr>
             </a:gs>
           </a:gsLst>
@@ -3619,23 +4026,23 @@
           <a:gsLst>
             <a:gs pos="0">
               <a:schemeClr val="phClr">
-                <a:tint val="97000"/>
-                <a:satMod val="100000"/>
+                <a:satMod val="103000"/>
                 <a:lumMod val="102000"/>
+                <a:tint val="94000"/>
               </a:schemeClr>
             </a:gs>
             <a:gs pos="50000">
               <a:schemeClr val="phClr">
+                <a:satMod val="110000"/>
+                <a:lumMod val="100000"/>
                 <a:shade val="100000"/>
-                <a:satMod val="103000"/>
-                <a:lumMod val="100000"/>
               </a:schemeClr>
             </a:gs>
             <a:gs pos="100000">
               <a:schemeClr val="phClr">
-                <a:shade val="93000"/>
-                <a:satMod val="110000"/>
                 <a:lumMod val="99000"/>
+                <a:satMod val="120000"/>
+                <a:shade val="78000"/>
               </a:schemeClr>
             </a:gs>
           </a:gsLst>
@@ -3643,23 +4050,26 @@
         </a:gradFill>
       </a:fillStyleLst>
       <a:lnStyleLst>
-        <a:ln w="6350" cap="flat" cmpd="sng" algn="ctr">
-          <a:solidFill>
-            <a:schemeClr val="phClr"/>
-          </a:solidFill>
-          <a:prstDash val="solid"/>
-        </a:ln>
         <a:ln w="12700" cap="flat" cmpd="sng" algn="ctr">
           <a:solidFill>
             <a:schemeClr val="phClr"/>
           </a:solidFill>
           <a:prstDash val="solid"/>
+          <a:miter lim="800000"/>
         </a:ln>
-        <a:ln w="31750" cap="flat" cmpd="sng" algn="ctr">
+        <a:ln w="19050" cap="flat" cmpd="sng" algn="ctr">
           <a:solidFill>
             <a:schemeClr val="phClr"/>
           </a:solidFill>
           <a:prstDash val="solid"/>
+          <a:miter lim="800000"/>
+        </a:ln>
+        <a:ln w="25400" cap="flat" cmpd="sng" algn="ctr">
+          <a:solidFill>
+            <a:schemeClr val="phClr"/>
+          </a:solidFill>
+          <a:prstDash val="solid"/>
+          <a:miter lim="800000"/>
         </a:ln>
       </a:lnStyleLst>
       <a:effectStyleLst>
@@ -3671,21 +4081,12 @@
         </a:effectStyle>
         <a:effectStyle>
           <a:effectLst>
-            <a:outerShdw blurRad="55880" dist="15240" dir="5400000" algn="ctr" rotWithShape="0">
+            <a:outerShdw blurRad="57150" dist="19050" dir="5400000" algn="ctr" rotWithShape="0">
               <a:srgbClr val="000000">
-                <a:alpha val="45000"/>
+                <a:alpha val="63000"/>
               </a:srgbClr>
             </a:outerShdw>
           </a:effectLst>
-          <a:scene3d>
-            <a:camera prst="orthographicFront">
-              <a:rot lat="0" lon="0" rev="0"/>
-            </a:camera>
-            <a:lightRig rig="brightRoom" dir="tl"/>
-          </a:scene3d>
-          <a:sp3d prstMaterial="dkEdge">
-            <a:bevelT w="0" h="0"/>
-          </a:sp3d>
         </a:effectStyle>
       </a:effectStyleLst>
       <a:bgFillStyleLst>
@@ -3702,33 +4103,57 @@
           <a:gsLst>
             <a:gs pos="0">
               <a:schemeClr val="phClr">
-                <a:tint val="97000"/>
-                <a:shade val="100000"/>
-                <a:satMod val="185000"/>
-                <a:lumMod val="120000"/>
+                <a:tint val="93000"/>
+                <a:satMod val="150000"/>
+                <a:shade val="98000"/>
+                <a:lumMod val="102000"/>
+              </a:schemeClr>
+            </a:gs>
+            <a:gs pos="50000">
+              <a:schemeClr val="phClr">
+                <a:tint val="98000"/>
+                <a:satMod val="130000"/>
+                <a:shade val="90000"/>
+                <a:lumMod val="103000"/>
               </a:schemeClr>
             </a:gs>
             <a:gs pos="100000">
               <a:schemeClr val="phClr">
-                <a:tint val="96000"/>
-                <a:shade val="95000"/>
-                <a:satMod val="215000"/>
-                <a:lumMod val="80000"/>
+                <a:shade val="63000"/>
+                <a:satMod val="120000"/>
               </a:schemeClr>
             </a:gs>
           </a:gsLst>
-          <a:path path="circle">
-            <a:fillToRect l="50000" t="55000" r="125000" b="100000"/>
-          </a:path>
+          <a:lin ang="5400000" scaled="0"/>
         </a:gradFill>
       </a:bgFillStyleLst>
     </a:fmtScheme>
   </a:themeElements>
-  <a:objectDefaults/>
+  <a:objectDefaults>
+    <a:lnDef>
+      <a:spPr/>
+      <a:bodyPr/>
+      <a:lstStyle/>
+      <a:style>
+        <a:lnRef idx="2">
+          <a:schemeClr val="accent1"/>
+        </a:lnRef>
+        <a:fillRef idx="0">
+          <a:schemeClr val="accent1"/>
+        </a:fillRef>
+        <a:effectRef idx="1">
+          <a:schemeClr val="accent1"/>
+        </a:effectRef>
+        <a:fontRef idx="minor">
+          <a:schemeClr val="tx1"/>
+        </a:fontRef>
+      </a:style>
+    </a:lnDef>
+  </a:objectDefaults>
   <a:extraClrSchemeLst/>
   <a:extLst>
     <a:ext uri="{05A4C25C-085E-4340-85A3-A5531E510DB2}">
-      <thm15:themeFamily xmlns:thm15="http://schemas.microsoft.com/office/thememl/2012/main" name="Parcel" id="{8BEC4385-4EB9-4D53-BFB5-0EA123736B6D}" vid="{4DB32801-28C0-48B0-8C1D-A9A58613615A}"/>
+      <thm15:themeFamily xmlns:thm15="http://schemas.microsoft.com/office/thememl/2012/main" name="Office Theme" id="{2E142A2C-CD16-42D6-873A-C26D2A0506FA}" vid="{1BDDFF52-6CD6-40A5-AB3C-68EB2F1E4D0A}"/>
     </a:ext>
   </a:extLst>
 </a:theme>

--- a/etc/graphic.pptx
+++ b/etc/graphic.pptx
@@ -8,6 +8,7 @@
     <p:sldId id="257" r:id="rId2"/>
     <p:sldId id="258" r:id="rId3"/>
     <p:sldId id="256" r:id="rId4"/>
+    <p:sldId id="259" r:id="rId5"/>
   </p:sldIdLst>
   <p:sldSz cx="12192000" cy="6858000"/>
   <p:notesSz cx="6858000" cy="9144000"/>
@@ -263,7 +264,7 @@
           <a:p>
             <a:fld id="{CAFD788F-134A-A74B-810A-CD2D2393E82C}" type="datetimeFigureOut">
               <a:rPr lang="en-TH" smtClean="0"/>
-              <a:t>19/6/2024 R</a:t>
+              <a:t>23/6/2024 R</a:t>
             </a:fld>
             <a:endParaRPr lang="en-TH"/>
           </a:p>
@@ -463,7 +464,7 @@
           <a:p>
             <a:fld id="{CAFD788F-134A-A74B-810A-CD2D2393E82C}" type="datetimeFigureOut">
               <a:rPr lang="en-TH" smtClean="0"/>
-              <a:t>19/6/2024 R</a:t>
+              <a:t>23/6/2024 R</a:t>
             </a:fld>
             <a:endParaRPr lang="en-TH"/>
           </a:p>
@@ -673,7 +674,7 @@
           <a:p>
             <a:fld id="{CAFD788F-134A-A74B-810A-CD2D2393E82C}" type="datetimeFigureOut">
               <a:rPr lang="en-TH" smtClean="0"/>
-              <a:t>19/6/2024 R</a:t>
+              <a:t>23/6/2024 R</a:t>
             </a:fld>
             <a:endParaRPr lang="en-TH"/>
           </a:p>
@@ -873,7 +874,7 @@
           <a:p>
             <a:fld id="{CAFD788F-134A-A74B-810A-CD2D2393E82C}" type="datetimeFigureOut">
               <a:rPr lang="en-TH" smtClean="0"/>
-              <a:t>19/6/2024 R</a:t>
+              <a:t>23/6/2024 R</a:t>
             </a:fld>
             <a:endParaRPr lang="en-TH"/>
           </a:p>
@@ -1149,7 +1150,7 @@
           <a:p>
             <a:fld id="{CAFD788F-134A-A74B-810A-CD2D2393E82C}" type="datetimeFigureOut">
               <a:rPr lang="en-TH" smtClean="0"/>
-              <a:t>19/6/2024 R</a:t>
+              <a:t>23/6/2024 R</a:t>
             </a:fld>
             <a:endParaRPr lang="en-TH"/>
           </a:p>
@@ -1417,7 +1418,7 @@
           <a:p>
             <a:fld id="{CAFD788F-134A-A74B-810A-CD2D2393E82C}" type="datetimeFigureOut">
               <a:rPr lang="en-TH" smtClean="0"/>
-              <a:t>19/6/2024 R</a:t>
+              <a:t>23/6/2024 R</a:t>
             </a:fld>
             <a:endParaRPr lang="en-TH"/>
           </a:p>
@@ -1832,7 +1833,7 @@
           <a:p>
             <a:fld id="{CAFD788F-134A-A74B-810A-CD2D2393E82C}" type="datetimeFigureOut">
               <a:rPr lang="en-TH" smtClean="0"/>
-              <a:t>19/6/2024 R</a:t>
+              <a:t>23/6/2024 R</a:t>
             </a:fld>
             <a:endParaRPr lang="en-TH"/>
           </a:p>
@@ -1974,7 +1975,7 @@
           <a:p>
             <a:fld id="{CAFD788F-134A-A74B-810A-CD2D2393E82C}" type="datetimeFigureOut">
               <a:rPr lang="en-TH" smtClean="0"/>
-              <a:t>19/6/2024 R</a:t>
+              <a:t>23/6/2024 R</a:t>
             </a:fld>
             <a:endParaRPr lang="en-TH"/>
           </a:p>
@@ -2087,7 +2088,7 @@
           <a:p>
             <a:fld id="{CAFD788F-134A-A74B-810A-CD2D2393E82C}" type="datetimeFigureOut">
               <a:rPr lang="en-TH" smtClean="0"/>
-              <a:t>19/6/2024 R</a:t>
+              <a:t>23/6/2024 R</a:t>
             </a:fld>
             <a:endParaRPr lang="en-TH"/>
           </a:p>
@@ -2400,7 +2401,7 @@
           <a:p>
             <a:fld id="{CAFD788F-134A-A74B-810A-CD2D2393E82C}" type="datetimeFigureOut">
               <a:rPr lang="en-TH" smtClean="0"/>
-              <a:t>19/6/2024 R</a:t>
+              <a:t>23/6/2024 R</a:t>
             </a:fld>
             <a:endParaRPr lang="en-TH"/>
           </a:p>
@@ -2689,7 +2690,7 @@
           <a:p>
             <a:fld id="{CAFD788F-134A-A74B-810A-CD2D2393E82C}" type="datetimeFigureOut">
               <a:rPr lang="en-TH" smtClean="0"/>
-              <a:t>19/6/2024 R</a:t>
+              <a:t>23/6/2024 R</a:t>
             </a:fld>
             <a:endParaRPr lang="en-TH"/>
           </a:p>
@@ -2932,7 +2933,7 @@
           <a:p>
             <a:fld id="{CAFD788F-134A-A74B-810A-CD2D2393E82C}" type="datetimeFigureOut">
               <a:rPr lang="en-TH" smtClean="0"/>
-              <a:t>19/6/2024 R</a:t>
+              <a:t>23/6/2024 R</a:t>
             </a:fld>
             <a:endParaRPr lang="en-TH"/>
           </a:p>
@@ -3844,6 +3845,96 @@
 </p:sld>
 </file>
 
+<file path=ppt/slides/slide4.xml><?xml version="1.0" encoding="utf-8"?>
+<p:sld xmlns:a="http://schemas.openxmlformats.org/drawingml/2006/main" xmlns:r="http://schemas.openxmlformats.org/officeDocument/2006/relationships" xmlns:p="http://schemas.openxmlformats.org/presentationml/2006/main">
+  <p:cSld>
+    <p:spTree>
+      <p:nvGrpSpPr>
+        <p:cNvPr id="1" name=""/>
+        <p:cNvGrpSpPr/>
+        <p:nvPr/>
+      </p:nvGrpSpPr>
+      <p:grpSpPr>
+        <a:xfrm>
+          <a:off x="0" y="0"/>
+          <a:ext cx="0" cy="0"/>
+          <a:chOff x="0" y="0"/>
+          <a:chExt cx="0" cy="0"/>
+        </a:xfrm>
+      </p:grpSpPr>
+      <p:sp>
+        <p:nvSpPr>
+          <p:cNvPr id="2" name="Title 1">
+            <a:extLst>
+              <a:ext uri="{FF2B5EF4-FFF2-40B4-BE49-F238E27FC236}">
+                <a16:creationId xmlns:a16="http://schemas.microsoft.com/office/drawing/2014/main" id="{3994BF53-2010-BC09-B0B8-A3DDEF68171E}"/>
+              </a:ext>
+            </a:extLst>
+          </p:cNvPr>
+          <p:cNvSpPr>
+            <a:spLocks noGrp="1"/>
+          </p:cNvSpPr>
+          <p:nvPr>
+            <p:ph type="title"/>
+          </p:nvPr>
+        </p:nvSpPr>
+        <p:spPr/>
+        <p:txBody>
+          <a:bodyPr/>
+          <a:lstStyle/>
+          <a:p>
+            <a:endParaRPr lang="en-TH"/>
+          </a:p>
+        </p:txBody>
+      </p:sp>
+      <p:pic>
+        <p:nvPicPr>
+          <p:cNvPr id="5" name="Content Placeholder 4" descr="Bar chart with solid fill">
+            <a:extLst>
+              <a:ext uri="{FF2B5EF4-FFF2-40B4-BE49-F238E27FC236}">
+                <a16:creationId xmlns:a16="http://schemas.microsoft.com/office/drawing/2014/main" id="{B1B5211E-A7DB-62FC-3B9F-E9A0465D694D}"/>
+              </a:ext>
+            </a:extLst>
+          </p:cNvPr>
+          <p:cNvPicPr>
+            <a:picLocks noGrp="1" noChangeAspect="1"/>
+          </p:cNvPicPr>
+          <p:nvPr>
+            <p:ph idx="1"/>
+          </p:nvPr>
+        </p:nvPicPr>
+        <p:blipFill>
+          <a:blip r:embed="rId2">
+            <a:extLst>
+              <a:ext uri="{96DAC541-7B7A-43D3-8B79-37D633B846F1}">
+                <asvg:svgBlip xmlns:asvg="http://schemas.microsoft.com/office/drawing/2016/SVG/main" r:embed="rId3"/>
+              </a:ext>
+            </a:extLst>
+          </a:blip>
+          <a:stretch>
+            <a:fillRect/>
+          </a:stretch>
+        </p:blipFill>
+        <p:spPr>
+          <a:xfrm>
+            <a:off x="2767011" y="2158205"/>
+            <a:ext cx="4442620" cy="4442620"/>
+          </a:xfrm>
+        </p:spPr>
+      </p:pic>
+    </p:spTree>
+    <p:extLst>
+      <p:ext uri="{BB962C8B-B14F-4D97-AF65-F5344CB8AC3E}">
+        <p14:creationId xmlns:p14="http://schemas.microsoft.com/office/powerpoint/2010/main" val="124671444"/>
+      </p:ext>
+    </p:extLst>
+  </p:cSld>
+  <p:clrMapOvr>
+    <a:masterClrMapping/>
+  </p:clrMapOvr>
+</p:sld>
+</file>
+
 <file path=ppt/theme/theme1.xml><?xml version="1.0" encoding="utf-8"?>
 <a:theme xmlns:a="http://schemas.openxmlformats.org/drawingml/2006/main" name="Office Theme">
   <a:themeElements>
